--- a/outputs/pipeline-playground-leadership-brief.pptx
+++ b/outputs/pipeline-playground-leadership-brief.pptx
@@ -2,20 +2,20 @@
 <file path=ppt/presentation.xml><?xml version="1.0" encoding="utf-8"?>
 <p:presentation xmlns:p="http://schemas.openxmlformats.org/presentationml/2006/main">
   <p:sldMasterIdLst>
-    <p:sldMasterId xmlns:r="http://schemas.openxmlformats.org/officeDocument/2006/relationships" id="2147483648" r:id="R067f5ff04b0048a3"/>
+    <p:sldMasterId xmlns:r="http://schemas.openxmlformats.org/officeDocument/2006/relationships" id="2147483648" r:id="R7c99eae0c74046fa"/>
   </p:sldMasterIdLst>
   <p:notesMasterIdLst>
-    <p:notesMasterId xmlns:r="http://schemas.openxmlformats.org/officeDocument/2006/relationships" r:id="R73a5fd9efe7d4ab9"/>
+    <p:notesMasterId xmlns:r="http://schemas.openxmlformats.org/officeDocument/2006/relationships" r:id="R8637d8a90b3e4d95"/>
   </p:notesMasterIdLst>
   <p:sldIdLst>
-    <p:sldId xmlns:r="http://schemas.openxmlformats.org/officeDocument/2006/relationships" id="256" r:id="R997fa6f60937416a"/>
-    <p:sldId xmlns:r="http://schemas.openxmlformats.org/officeDocument/2006/relationships" id="257" r:id="R70dd457310be4812"/>
-    <p:sldId xmlns:r="http://schemas.openxmlformats.org/officeDocument/2006/relationships" id="258" r:id="R8b0bedcb04804c88"/>
-    <p:sldId xmlns:r="http://schemas.openxmlformats.org/officeDocument/2006/relationships" id="259" r:id="Rad43bd9a7f684dbc"/>
-    <p:sldId xmlns:r="http://schemas.openxmlformats.org/officeDocument/2006/relationships" id="260" r:id="R52e3ea1d77234e9d"/>
-    <p:sldId xmlns:r="http://schemas.openxmlformats.org/officeDocument/2006/relationships" id="261" r:id="Rcaa4807b4e9c498a"/>
-    <p:sldId xmlns:r="http://schemas.openxmlformats.org/officeDocument/2006/relationships" id="262" r:id="R6028360736264788"/>
-    <p:sldId xmlns:r="http://schemas.openxmlformats.org/officeDocument/2006/relationships" id="263" r:id="R5dd3efb99c1049c7"/>
+    <p:sldId xmlns:r="http://schemas.openxmlformats.org/officeDocument/2006/relationships" id="256" r:id="Rf810e0c568af40bd"/>
+    <p:sldId xmlns:r="http://schemas.openxmlformats.org/officeDocument/2006/relationships" id="257" r:id="Rf3834221cce749ad"/>
+    <p:sldId xmlns:r="http://schemas.openxmlformats.org/officeDocument/2006/relationships" id="258" r:id="R326391fb59e043b8"/>
+    <p:sldId xmlns:r="http://schemas.openxmlformats.org/officeDocument/2006/relationships" id="259" r:id="R38a8210a5051462b"/>
+    <p:sldId xmlns:r="http://schemas.openxmlformats.org/officeDocument/2006/relationships" id="260" r:id="R28a1e930f64a4996"/>
+    <p:sldId xmlns:r="http://schemas.openxmlformats.org/officeDocument/2006/relationships" id="261" r:id="R84865757f9f64a53"/>
+    <p:sldId xmlns:r="http://schemas.openxmlformats.org/officeDocument/2006/relationships" id="262" r:id="R682e2d8fe54349da"/>
+    <p:sldId xmlns:r="http://schemas.openxmlformats.org/officeDocument/2006/relationships" id="263" r:id="Ree345c8d61534e30"/>
   </p:sldIdLst>
   <p:sldSz cx="12192000" cy="6858000"/>
   <p:notesSz cx="6858000" cy="9144000"/>
@@ -1070,7 +1070,7 @@
   </p:cSld>
   <p:clrMap bg1="lt1" tx1="dk1" bg2="lt2" tx2="dk2" accent1="accent1" accent2="accent2" accent3="accent3" accent4="accent4" accent5="accent5" accent6="accent6" hlink="hlink" folHlink="folHlink"/>
   <p:sldLayoutIdLst>
-    <p:sldLayoutId xmlns:r="http://schemas.openxmlformats.org/officeDocument/2006/relationships" id="2147483649" r:id="R897c27e8bfb24688"/>
+    <p:sldLayoutId xmlns:r="http://schemas.openxmlformats.org/officeDocument/2006/relationships" id="2147483649" r:id="Rf4fe9c359981406f"/>
   </p:sldLayoutIdLst>
   <p:txStyles>
     <p:titleStyle>
@@ -1621,7 +1621,7 @@
           <p:cNvPr id="21" name="">
             <a:extLst xmlns:a="http://schemas.openxmlformats.org/drawingml/2006/main">
               <a:ext uri="{FF2B5EF4-FFF2-40B4-BE49-F238E27FC236}">
-                <a16:creationId xmlns:a16="http://schemas.microsoft.com/office/drawing/2014/main" id="{97742A40-1C64-4B28-8B42-AF114139C0DB}"/>
+                <a16:creationId xmlns:a16="http://schemas.microsoft.com/office/drawing/2014/main" id="{E2991D74-3E79-4721-9126-C22134378E8E}"/>
               </a:ext>
             </a:extLst>
           </p:cNvPr>
@@ -1652,7 +1652,7 @@
           <p:cNvPr id="2" name="">
             <a:extLst xmlns:a="http://schemas.openxmlformats.org/drawingml/2006/main">
               <a:ext uri="{FF2B5EF4-FFF2-40B4-BE49-F238E27FC236}">
-                <a16:creationId xmlns:a16="http://schemas.microsoft.com/office/drawing/2014/main" id="{1047A1D5-C1A3-4112-B43A-C919A92DEFC9}"/>
+                <a16:creationId xmlns:a16="http://schemas.microsoft.com/office/drawing/2014/main" id="{596486F9-3BE6-43C1-B3AD-2547BDC0DC4D}"/>
               </a:ext>
             </a:extLst>
           </p:cNvPr>
@@ -1683,7 +1683,7 @@
           <p:cNvPr id="3" name="">
             <a:extLst xmlns:a="http://schemas.openxmlformats.org/drawingml/2006/main">
               <a:ext uri="{FF2B5EF4-FFF2-40B4-BE49-F238E27FC236}">
-                <a16:creationId xmlns:a16="http://schemas.microsoft.com/office/drawing/2014/main" id="{94CF804B-D369-4CC4-959C-81884B77A5DD}"/>
+                <a16:creationId xmlns:a16="http://schemas.microsoft.com/office/drawing/2014/main" id="{4E66CC42-7E36-41E7-BE72-0F109671ED5A}"/>
               </a:ext>
             </a:extLst>
           </p:cNvPr>
@@ -1695,7 +1695,7 @@
         <p:spPr>
           <a:xfrm xmlns:a="http://schemas.openxmlformats.org/drawingml/2006/main">
             <a:off x="685800" y="723900"/>
-            <a:ext cx="4762500" cy="266700"/>
+            <a:ext cx="6667500" cy="266700"/>
           </a:xfrm>
           <a:prstGeom xmlns:a="http://schemas.openxmlformats.org/drawingml/2006/main" prst="rect">
             <a:avLst/>
@@ -1723,7 +1723,7 @@
                   <a:srgbClr val="FF7A00"/>
                 </a:solidFill>
               </a:rPr>
-              <a:t>PIPELINE PLAYGROUND</a:t>
+              <a:t>PIPELINE PLAYGROUND  •  ARCHITECTURE RECOMMENDATION</a:t>
             </a:r>
           </a:p>
         </p:txBody>
@@ -1733,7 +1733,7 @@
           <p:cNvPr id="4" name="">
             <a:extLst xmlns:a="http://schemas.openxmlformats.org/drawingml/2006/main">
               <a:ext uri="{FF2B5EF4-FFF2-40B4-BE49-F238E27FC236}">
-                <a16:creationId xmlns:a16="http://schemas.microsoft.com/office/drawing/2014/main" id="{9AEB501A-8CAC-4860-9367-8E442163C06F}"/>
+                <a16:creationId xmlns:a16="http://schemas.microsoft.com/office/drawing/2014/main" id="{86C2C9F5-0426-488F-9A0D-D7B39B181E63}"/>
               </a:ext>
             </a:extLst>
           </p:cNvPr>
@@ -1800,7 +1800,7 @@
           <p:cNvPr id="5" name="">
             <a:extLst xmlns:a="http://schemas.openxmlformats.org/drawingml/2006/main">
               <a:ext uri="{FF2B5EF4-FFF2-40B4-BE49-F238E27FC236}">
-                <a16:creationId xmlns:a16="http://schemas.microsoft.com/office/drawing/2014/main" id="{9D94BF32-2827-4C02-916B-E58F70D223A5}"/>
+                <a16:creationId xmlns:a16="http://schemas.microsoft.com/office/drawing/2014/main" id="{F07F05CE-71D4-40CC-8D16-0774674B37D5}"/>
               </a:ext>
             </a:extLst>
           </p:cNvPr>
@@ -1850,7 +1850,7 @@
           <p:cNvPr id="6" name="">
             <a:extLst xmlns:a="http://schemas.openxmlformats.org/drawingml/2006/main">
               <a:ext uri="{FF2B5EF4-FFF2-40B4-BE49-F238E27FC236}">
-                <a16:creationId xmlns:a16="http://schemas.microsoft.com/office/drawing/2014/main" id="{A955431B-4ED0-4984-A522-3AC0B4506488}"/>
+                <a16:creationId xmlns:a16="http://schemas.microsoft.com/office/drawing/2014/main" id="{6A4006AE-9926-41D4-8328-B3BD194D5209}"/>
               </a:ext>
             </a:extLst>
           </p:cNvPr>
@@ -1885,7 +1885,7 @@
           <p:cNvPr id="7" name="">
             <a:extLst xmlns:a="http://schemas.openxmlformats.org/drawingml/2006/main">
               <a:ext uri="{FF2B5EF4-FFF2-40B4-BE49-F238E27FC236}">
-                <a16:creationId xmlns:a16="http://schemas.microsoft.com/office/drawing/2014/main" id="{30228F16-B4C0-4928-AC4E-3BD795DD8AAE}"/>
+                <a16:creationId xmlns:a16="http://schemas.microsoft.com/office/drawing/2014/main" id="{93F24D2F-230D-4BAC-8D5C-F401CB2B3FF2}"/>
               </a:ext>
             </a:extLst>
           </p:cNvPr>
@@ -1918,7 +1918,7 @@
           <p:cNvPr id="8" name="">
             <a:extLst xmlns:a="http://schemas.openxmlformats.org/drawingml/2006/main">
               <a:ext uri="{FF2B5EF4-FFF2-40B4-BE49-F238E27FC236}">
-                <a16:creationId xmlns:a16="http://schemas.microsoft.com/office/drawing/2014/main" id="{D9467712-D273-4965-A65F-5D9726821656}"/>
+                <a16:creationId xmlns:a16="http://schemas.microsoft.com/office/drawing/2014/main" id="{27B31C06-A5A9-4F61-BB2D-048B6BC3A9F9}"/>
               </a:ext>
             </a:extLst>
           </p:cNvPr>
@@ -1968,7 +1968,7 @@
           <p:cNvPr id="9" name="">
             <a:extLst xmlns:a="http://schemas.openxmlformats.org/drawingml/2006/main">
               <a:ext uri="{FF2B5EF4-FFF2-40B4-BE49-F238E27FC236}">
-                <a16:creationId xmlns:a16="http://schemas.microsoft.com/office/drawing/2014/main" id="{B1A8B573-E910-40FF-9153-4ACB88A17599}"/>
+                <a16:creationId xmlns:a16="http://schemas.microsoft.com/office/drawing/2014/main" id="{39877E9D-F33C-4426-84E6-39E412404484}"/>
               </a:ext>
             </a:extLst>
           </p:cNvPr>
@@ -2018,7 +2018,7 @@
           <p:cNvPr id="10" name="">
             <a:extLst xmlns:a="http://schemas.openxmlformats.org/drawingml/2006/main">
               <a:ext uri="{FF2B5EF4-FFF2-40B4-BE49-F238E27FC236}">
-                <a16:creationId xmlns:a16="http://schemas.microsoft.com/office/drawing/2014/main" id="{15973FEC-92E3-4881-9B16-AE842E82B717}"/>
+                <a16:creationId xmlns:a16="http://schemas.microsoft.com/office/drawing/2014/main" id="{A8937FCA-4037-4161-B97F-9464E903C54B}"/>
               </a:ext>
             </a:extLst>
           </p:cNvPr>
@@ -2053,7 +2053,7 @@
           <p:cNvPr id="11" name="">
             <a:extLst xmlns:a="http://schemas.openxmlformats.org/drawingml/2006/main">
               <a:ext uri="{FF2B5EF4-FFF2-40B4-BE49-F238E27FC236}">
-                <a16:creationId xmlns:a16="http://schemas.microsoft.com/office/drawing/2014/main" id="{FDD6E936-8727-447B-83F2-A3D061320ED1}"/>
+                <a16:creationId xmlns:a16="http://schemas.microsoft.com/office/drawing/2014/main" id="{E0E4652B-3A74-46B7-BFE4-7C745617AF1E}"/>
               </a:ext>
             </a:extLst>
           </p:cNvPr>
@@ -2086,7 +2086,7 @@
           <p:cNvPr id="12" name="">
             <a:extLst xmlns:a="http://schemas.openxmlformats.org/drawingml/2006/main">
               <a:ext uri="{FF2B5EF4-FFF2-40B4-BE49-F238E27FC236}">
-                <a16:creationId xmlns:a16="http://schemas.microsoft.com/office/drawing/2014/main" id="{A81D5BB4-12AB-4B60-91A9-5F139FF82DAD}"/>
+                <a16:creationId xmlns:a16="http://schemas.microsoft.com/office/drawing/2014/main" id="{944264CB-EB1D-42BF-8F21-A904E06F2360}"/>
               </a:ext>
             </a:extLst>
           </p:cNvPr>
@@ -2136,7 +2136,7 @@
           <p:cNvPr id="13" name="">
             <a:extLst xmlns:a="http://schemas.openxmlformats.org/drawingml/2006/main">
               <a:ext uri="{FF2B5EF4-FFF2-40B4-BE49-F238E27FC236}">
-                <a16:creationId xmlns:a16="http://schemas.microsoft.com/office/drawing/2014/main" id="{BED9CE8D-8247-44F9-BA34-1DB7FF96B457}"/>
+                <a16:creationId xmlns:a16="http://schemas.microsoft.com/office/drawing/2014/main" id="{E23C8B13-8636-4AE8-A40D-3FC64E076204}"/>
               </a:ext>
             </a:extLst>
           </p:cNvPr>
@@ -2186,7 +2186,7 @@
           <p:cNvPr id="14" name="">
             <a:extLst xmlns:a="http://schemas.openxmlformats.org/drawingml/2006/main">
               <a:ext uri="{FF2B5EF4-FFF2-40B4-BE49-F238E27FC236}">
-                <a16:creationId xmlns:a16="http://schemas.microsoft.com/office/drawing/2014/main" id="{954C6F8F-B54B-43A7-BC52-C359A4A5A722}"/>
+                <a16:creationId xmlns:a16="http://schemas.microsoft.com/office/drawing/2014/main" id="{C7A34295-9EDB-47F7-9140-1CB5ED19BD24}"/>
               </a:ext>
             </a:extLst>
           </p:cNvPr>
@@ -2221,7 +2221,7 @@
           <p:cNvPr id="15" name="">
             <a:extLst xmlns:a="http://schemas.openxmlformats.org/drawingml/2006/main">
               <a:ext uri="{FF2B5EF4-FFF2-40B4-BE49-F238E27FC236}">
-                <a16:creationId xmlns:a16="http://schemas.microsoft.com/office/drawing/2014/main" id="{48423ABA-146D-4578-BB68-CA9D0A5D1093}"/>
+                <a16:creationId xmlns:a16="http://schemas.microsoft.com/office/drawing/2014/main" id="{832EAEE3-8B17-4EF6-B390-D1ABACE366BD}"/>
               </a:ext>
             </a:extLst>
           </p:cNvPr>
@@ -2254,7 +2254,7 @@
           <p:cNvPr id="16" name="">
             <a:extLst xmlns:a="http://schemas.openxmlformats.org/drawingml/2006/main">
               <a:ext uri="{FF2B5EF4-FFF2-40B4-BE49-F238E27FC236}">
-                <a16:creationId xmlns:a16="http://schemas.microsoft.com/office/drawing/2014/main" id="{97BC136C-AD32-4B2E-B53F-8A8A423A1A2F}"/>
+                <a16:creationId xmlns:a16="http://schemas.microsoft.com/office/drawing/2014/main" id="{CE521D13-2664-454A-8B86-8726A511B89B}"/>
               </a:ext>
             </a:extLst>
           </p:cNvPr>
@@ -2304,7 +2304,7 @@
           <p:cNvPr id="17" name="">
             <a:extLst xmlns:a="http://schemas.openxmlformats.org/drawingml/2006/main">
               <a:ext uri="{FF2B5EF4-FFF2-40B4-BE49-F238E27FC236}">
-                <a16:creationId xmlns:a16="http://schemas.microsoft.com/office/drawing/2014/main" id="{EFBD5016-923D-44AE-A87A-3B44A0223E15}"/>
+                <a16:creationId xmlns:a16="http://schemas.microsoft.com/office/drawing/2014/main" id="{CC1E2A01-6D76-4442-9E20-31668261594E}"/>
               </a:ext>
             </a:extLst>
           </p:cNvPr>
@@ -2406,7 +2406,7 @@
           <p:cNvPr id="20" name="">
             <a:extLst xmlns:a="http://schemas.openxmlformats.org/drawingml/2006/main">
               <a:ext uri="{FF2B5EF4-FFF2-40B4-BE49-F238E27FC236}">
-                <a16:creationId xmlns:a16="http://schemas.microsoft.com/office/drawing/2014/main" id="{A8C7CE93-E6F2-4148-925B-2F2C5605587D}"/>
+                <a16:creationId xmlns:a16="http://schemas.microsoft.com/office/drawing/2014/main" id="{1A34C4E5-9C07-4C75-B10A-33CF41D2CD3A}"/>
               </a:ext>
             </a:extLst>
           </p:cNvPr>
@@ -2446,7 +2446,7 @@
                   <a:srgbClr val="697586"/>
                 </a:solidFill>
               </a:rPr>
-              <a:t>LEADERSHIP OVERVIEW</a:t>
+              <a:t>BRIEF FOR LEADERSHIP</a:t>
             </a:r>
           </a:p>
         </p:txBody>
@@ -2454,7 +2454,7 @@
     </p:spTree>
     <p:extLst>
       <p:ext uri="{BB962C8B-B14F-4D97-AF65-F5344CB8AC3E}">
-        <p14:creationId xmlns:p14="http://schemas.microsoft.com/office/powerpoint/2010/main" val="1545285270"/>
+        <p14:creationId xmlns:p14="http://schemas.microsoft.com/office/powerpoint/2010/main" val="398530288"/>
       </p:ext>
     </p:extLst>
   </p:cSld>
@@ -2485,7 +2485,7 @@
           <p:cNvPr id="19" name="">
             <a:extLst xmlns:a="http://schemas.openxmlformats.org/drawingml/2006/main">
               <a:ext uri="{FF2B5EF4-FFF2-40B4-BE49-F238E27FC236}">
-                <a16:creationId xmlns:a16="http://schemas.microsoft.com/office/drawing/2014/main" id="{23E3550C-6B28-422B-BAFD-C2CE1AEA2D30}"/>
+                <a16:creationId xmlns:a16="http://schemas.microsoft.com/office/drawing/2014/main" id="{B02851F8-4EA2-4F89-A778-F51B10F58091}"/>
               </a:ext>
             </a:extLst>
           </p:cNvPr>
@@ -2516,7 +2516,7 @@
           <p:cNvPr id="2" name="">
             <a:extLst xmlns:a="http://schemas.openxmlformats.org/drawingml/2006/main">
               <a:ext uri="{FF2B5EF4-FFF2-40B4-BE49-F238E27FC236}">
-                <a16:creationId xmlns:a16="http://schemas.microsoft.com/office/drawing/2014/main" id="{7179CF6D-685E-4AA7-B297-0924991E7BEA}"/>
+                <a16:creationId xmlns:a16="http://schemas.microsoft.com/office/drawing/2014/main" id="{018FC2DC-43F0-4103-8EB3-CF895DCFA339}"/>
               </a:ext>
             </a:extLst>
           </p:cNvPr>
@@ -2566,7 +2566,7 @@
           <p:cNvPr id="3" name="">
             <a:extLst xmlns:a="http://schemas.openxmlformats.org/drawingml/2006/main">
               <a:ext uri="{FF2B5EF4-FFF2-40B4-BE49-F238E27FC236}">
-                <a16:creationId xmlns:a16="http://schemas.microsoft.com/office/drawing/2014/main" id="{5BA5F202-1ED1-4AC3-897F-E68386083419}"/>
+                <a16:creationId xmlns:a16="http://schemas.microsoft.com/office/drawing/2014/main" id="{B80F412B-98C2-4DEE-868B-FF0F47FE40BE}"/>
               </a:ext>
             </a:extLst>
           </p:cNvPr>
@@ -2616,7 +2616,7 @@
           <p:cNvPr id="4" name="">
             <a:extLst xmlns:a="http://schemas.openxmlformats.org/drawingml/2006/main">
               <a:ext uri="{FF2B5EF4-FFF2-40B4-BE49-F238E27FC236}">
-                <a16:creationId xmlns:a16="http://schemas.microsoft.com/office/drawing/2014/main" id="{E08539EA-9D4E-4FD9-98D4-CD9B2540B915}"/>
+                <a16:creationId xmlns:a16="http://schemas.microsoft.com/office/drawing/2014/main" id="{ED151D02-2A46-41F4-9582-484A239E6763}"/>
               </a:ext>
             </a:extLst>
           </p:cNvPr>
@@ -2647,7 +2647,7 @@
           <p:cNvPr id="5" name="">
             <a:extLst xmlns:a="http://schemas.openxmlformats.org/drawingml/2006/main">
               <a:ext uri="{FF2B5EF4-FFF2-40B4-BE49-F238E27FC236}">
-                <a16:creationId xmlns:a16="http://schemas.microsoft.com/office/drawing/2014/main" id="{A00A66FE-1087-49C6-BF1C-BECDD546C15E}"/>
+                <a16:creationId xmlns:a16="http://schemas.microsoft.com/office/drawing/2014/main" id="{61C4E394-5D0E-4FE2-82F0-40F1DEBBD63D}"/>
               </a:ext>
             </a:extLst>
           </p:cNvPr>
@@ -2697,7 +2697,7 @@
           <p:cNvPr id="6" name="">
             <a:extLst xmlns:a="http://schemas.openxmlformats.org/drawingml/2006/main">
               <a:ext uri="{FF2B5EF4-FFF2-40B4-BE49-F238E27FC236}">
-                <a16:creationId xmlns:a16="http://schemas.microsoft.com/office/drawing/2014/main" id="{761A606D-6A6E-4C06-AB8B-EB120F9CED60}"/>
+                <a16:creationId xmlns:a16="http://schemas.microsoft.com/office/drawing/2014/main" id="{4009F7D7-C3BC-4926-B2D0-8CE5FFF5949E}"/>
               </a:ext>
             </a:extLst>
           </p:cNvPr>
@@ -2747,7 +2747,7 @@
           <p:cNvPr id="7" name="">
             <a:extLst xmlns:a="http://schemas.openxmlformats.org/drawingml/2006/main">
               <a:ext uri="{FF2B5EF4-FFF2-40B4-BE49-F238E27FC236}">
-                <a16:creationId xmlns:a16="http://schemas.microsoft.com/office/drawing/2014/main" id="{0C67E684-9ED5-4B9D-AABC-2848A791B634}"/>
+                <a16:creationId xmlns:a16="http://schemas.microsoft.com/office/drawing/2014/main" id="{A6836269-45C0-4E71-B041-B56D246F2EB5}"/>
               </a:ext>
             </a:extLst>
           </p:cNvPr>
@@ -2780,7 +2780,7 @@
           <p:cNvPr id="8" name="">
             <a:extLst xmlns:a="http://schemas.openxmlformats.org/drawingml/2006/main">
               <a:ext uri="{FF2B5EF4-FFF2-40B4-BE49-F238E27FC236}">
-                <a16:creationId xmlns:a16="http://schemas.microsoft.com/office/drawing/2014/main" id="{E682C99A-BFF8-47CD-A149-B0E03F268FB5}"/>
+                <a16:creationId xmlns:a16="http://schemas.microsoft.com/office/drawing/2014/main" id="{4E07B2E1-4977-4CEB-AA98-58A0CF2A98F5}"/>
               </a:ext>
             </a:extLst>
           </p:cNvPr>
@@ -2830,7 +2830,7 @@
           <p:cNvPr id="9" name="">
             <a:extLst xmlns:a="http://schemas.openxmlformats.org/drawingml/2006/main">
               <a:ext uri="{FF2B5EF4-FFF2-40B4-BE49-F238E27FC236}">
-                <a16:creationId xmlns:a16="http://schemas.microsoft.com/office/drawing/2014/main" id="{95B0F3EB-A21B-4046-A4E6-1951AC393A9F}"/>
+                <a16:creationId xmlns:a16="http://schemas.microsoft.com/office/drawing/2014/main" id="{AE4DACFE-6E47-41C3-B411-02D70FDD0A43}"/>
               </a:ext>
             </a:extLst>
           </p:cNvPr>
@@ -2880,7 +2880,7 @@
           <p:cNvPr id="10" name="">
             <a:extLst xmlns:a="http://schemas.openxmlformats.org/drawingml/2006/main">
               <a:ext uri="{FF2B5EF4-FFF2-40B4-BE49-F238E27FC236}">
-                <a16:creationId xmlns:a16="http://schemas.microsoft.com/office/drawing/2014/main" id="{9972B184-13ED-409E-B81C-1BF544DE9076}"/>
+                <a16:creationId xmlns:a16="http://schemas.microsoft.com/office/drawing/2014/main" id="{35432758-C9FC-4195-A500-B21669086F1F}"/>
               </a:ext>
             </a:extLst>
           </p:cNvPr>
@@ -2930,7 +2930,7 @@
           <p:cNvPr id="11" name="">
             <a:extLst xmlns:a="http://schemas.openxmlformats.org/drawingml/2006/main">
               <a:ext uri="{FF2B5EF4-FFF2-40B4-BE49-F238E27FC236}">
-                <a16:creationId xmlns:a16="http://schemas.microsoft.com/office/drawing/2014/main" id="{A03C8AE3-9CC7-40B2-A37B-1945B3BE7D0E}"/>
+                <a16:creationId xmlns:a16="http://schemas.microsoft.com/office/drawing/2014/main" id="{8854839B-AF1E-40B9-B120-5F0E6C06426F}"/>
               </a:ext>
             </a:extLst>
           </p:cNvPr>
@@ -2980,7 +2980,7 @@
           <p:cNvPr id="12" name="">
             <a:extLst xmlns:a="http://schemas.openxmlformats.org/drawingml/2006/main">
               <a:ext uri="{FF2B5EF4-FFF2-40B4-BE49-F238E27FC236}">
-                <a16:creationId xmlns:a16="http://schemas.microsoft.com/office/drawing/2014/main" id="{99CCF5C3-A16E-47E9-9DDC-CB1335222706}"/>
+                <a16:creationId xmlns:a16="http://schemas.microsoft.com/office/drawing/2014/main" id="{8EFFCE3F-C8DB-428C-A5B5-3D4D6C87852A}"/>
               </a:ext>
             </a:extLst>
           </p:cNvPr>
@@ -3030,7 +3030,7 @@
           <p:cNvPr id="13" name="">
             <a:extLst xmlns:a="http://schemas.openxmlformats.org/drawingml/2006/main">
               <a:ext uri="{FF2B5EF4-FFF2-40B4-BE49-F238E27FC236}">
-                <a16:creationId xmlns:a16="http://schemas.microsoft.com/office/drawing/2014/main" id="{4E4ECF88-F843-4D91-B320-740015993585}"/>
+                <a16:creationId xmlns:a16="http://schemas.microsoft.com/office/drawing/2014/main" id="{9412924A-F0C8-40C9-B688-40A2403FDDCE}"/>
               </a:ext>
             </a:extLst>
           </p:cNvPr>
@@ -3080,7 +3080,7 @@
           <p:cNvPr id="14" name="">
             <a:extLst xmlns:a="http://schemas.openxmlformats.org/drawingml/2006/main">
               <a:ext uri="{FF2B5EF4-FFF2-40B4-BE49-F238E27FC236}">
-                <a16:creationId xmlns:a16="http://schemas.microsoft.com/office/drawing/2014/main" id="{64475424-8F84-44F0-A2BE-307F9F578C56}"/>
+                <a16:creationId xmlns:a16="http://schemas.microsoft.com/office/drawing/2014/main" id="{7A88DAB1-6B2F-4D07-9824-444DFFA80CD4}"/>
               </a:ext>
             </a:extLst>
           </p:cNvPr>
@@ -3130,7 +3130,7 @@
           <p:cNvPr id="15" name="">
             <a:extLst xmlns:a="http://schemas.openxmlformats.org/drawingml/2006/main">
               <a:ext uri="{FF2B5EF4-FFF2-40B4-BE49-F238E27FC236}">
-                <a16:creationId xmlns:a16="http://schemas.microsoft.com/office/drawing/2014/main" id="{7B678E78-8176-4E6C-866B-E69F8B2FFFBE}"/>
+                <a16:creationId xmlns:a16="http://schemas.microsoft.com/office/drawing/2014/main" id="{1D6A0914-9A78-434D-A8CC-26805ECAFD81}"/>
               </a:ext>
             </a:extLst>
           </p:cNvPr>
@@ -3180,7 +3180,7 @@
           <p:cNvPr id="16" name="">
             <a:extLst xmlns:a="http://schemas.openxmlformats.org/drawingml/2006/main">
               <a:ext uri="{FF2B5EF4-FFF2-40B4-BE49-F238E27FC236}">
-                <a16:creationId xmlns:a16="http://schemas.microsoft.com/office/drawing/2014/main" id="{630DF0CF-425F-4FF9-8992-217EFC46A8EC}"/>
+                <a16:creationId xmlns:a16="http://schemas.microsoft.com/office/drawing/2014/main" id="{D620181B-2C25-447F-B77E-C60B878A0D18}"/>
               </a:ext>
             </a:extLst>
           </p:cNvPr>
@@ -3230,7 +3230,7 @@
           <p:cNvPr id="17" name="">
             <a:extLst xmlns:a="http://schemas.openxmlformats.org/drawingml/2006/main">
               <a:ext uri="{FF2B5EF4-FFF2-40B4-BE49-F238E27FC236}">
-                <a16:creationId xmlns:a16="http://schemas.microsoft.com/office/drawing/2014/main" id="{362A4054-35AF-4964-AADC-49259E6BE951}"/>
+                <a16:creationId xmlns:a16="http://schemas.microsoft.com/office/drawing/2014/main" id="{6EBC7D72-9D4F-4211-ABDA-C34CD303392E}"/>
               </a:ext>
             </a:extLst>
           </p:cNvPr>
@@ -3280,7 +3280,7 @@
           <p:cNvPr id="18" name="">
             <a:extLst xmlns:a="http://schemas.openxmlformats.org/drawingml/2006/main">
               <a:ext uri="{FF2B5EF4-FFF2-40B4-BE49-F238E27FC236}">
-                <a16:creationId xmlns:a16="http://schemas.microsoft.com/office/drawing/2014/main" id="{8D494930-0DE1-48AF-87BF-866F211B4A72}"/>
+                <a16:creationId xmlns:a16="http://schemas.microsoft.com/office/drawing/2014/main" id="{9D7B0E42-2F3B-4A44-AE4B-9879B78C85DB}"/>
               </a:ext>
             </a:extLst>
           </p:cNvPr>
@@ -3328,7 +3328,7 @@
     </p:spTree>
     <p:extLst>
       <p:ext uri="{BB962C8B-B14F-4D97-AF65-F5344CB8AC3E}">
-        <p14:creationId xmlns:p14="http://schemas.microsoft.com/office/powerpoint/2010/main" val="1385490676"/>
+        <p14:creationId xmlns:p14="http://schemas.microsoft.com/office/powerpoint/2010/main" val="250657493"/>
       </p:ext>
     </p:extLst>
   </p:cSld>
@@ -3359,7 +3359,7 @@
           <p:cNvPr id="24" name="">
             <a:extLst xmlns:a="http://schemas.openxmlformats.org/drawingml/2006/main">
               <a:ext uri="{FF2B5EF4-FFF2-40B4-BE49-F238E27FC236}">
-                <a16:creationId xmlns:a16="http://schemas.microsoft.com/office/drawing/2014/main" id="{CAE97676-0D0F-4152-ACC1-3F6DC5792676}"/>
+                <a16:creationId xmlns:a16="http://schemas.microsoft.com/office/drawing/2014/main" id="{BE58F852-CC0F-4368-87FE-C41068AA9F1C}"/>
               </a:ext>
             </a:extLst>
           </p:cNvPr>
@@ -3390,7 +3390,7 @@
           <p:cNvPr id="2" name="">
             <a:extLst xmlns:a="http://schemas.openxmlformats.org/drawingml/2006/main">
               <a:ext uri="{FF2B5EF4-FFF2-40B4-BE49-F238E27FC236}">
-                <a16:creationId xmlns:a16="http://schemas.microsoft.com/office/drawing/2014/main" id="{CD5AD650-E816-4DCF-A471-1F800704ADAF}"/>
+                <a16:creationId xmlns:a16="http://schemas.microsoft.com/office/drawing/2014/main" id="{754395F1-F9E4-4733-B556-C2DA11F1920A}"/>
               </a:ext>
             </a:extLst>
           </p:cNvPr>
@@ -3440,7 +3440,7 @@
           <p:cNvPr id="3" name="">
             <a:extLst xmlns:a="http://schemas.openxmlformats.org/drawingml/2006/main">
               <a:ext uri="{FF2B5EF4-FFF2-40B4-BE49-F238E27FC236}">
-                <a16:creationId xmlns:a16="http://schemas.microsoft.com/office/drawing/2014/main" id="{60869AEF-3393-43F3-AC0A-6DFEC53D3F1E}"/>
+                <a16:creationId xmlns:a16="http://schemas.microsoft.com/office/drawing/2014/main" id="{A928903C-6F9E-4D3A-8774-B8C40FE3782D}"/>
               </a:ext>
             </a:extLst>
           </p:cNvPr>
@@ -3490,7 +3490,7 @@
           <p:cNvPr id="4" name="">
             <a:extLst xmlns:a="http://schemas.openxmlformats.org/drawingml/2006/main">
               <a:ext uri="{FF2B5EF4-FFF2-40B4-BE49-F238E27FC236}">
-                <a16:creationId xmlns:a16="http://schemas.microsoft.com/office/drawing/2014/main" id="{4C5D3032-E3D7-4976-8052-61D08D81CF15}"/>
+                <a16:creationId xmlns:a16="http://schemas.microsoft.com/office/drawing/2014/main" id="{4457F604-B7C5-4B8B-AAE8-B5C0227F3DA3}"/>
               </a:ext>
             </a:extLst>
           </p:cNvPr>
@@ -3521,7 +3521,7 @@
           <p:cNvPr id="5" name="">
             <a:extLst xmlns:a="http://schemas.openxmlformats.org/drawingml/2006/main">
               <a:ext uri="{FF2B5EF4-FFF2-40B4-BE49-F238E27FC236}">
-                <a16:creationId xmlns:a16="http://schemas.microsoft.com/office/drawing/2014/main" id="{FFBBFC83-5F33-40E9-B61E-7AE9303BFA1F}"/>
+                <a16:creationId xmlns:a16="http://schemas.microsoft.com/office/drawing/2014/main" id="{42760C4D-E2A4-4DB1-9B93-A2701B1B025F}"/>
               </a:ext>
             </a:extLst>
           </p:cNvPr>
@@ -3571,7 +3571,7 @@
           <p:cNvPr id="6" name="">
             <a:extLst xmlns:a="http://schemas.openxmlformats.org/drawingml/2006/main">
               <a:ext uri="{FF2B5EF4-FFF2-40B4-BE49-F238E27FC236}">
-                <a16:creationId xmlns:a16="http://schemas.microsoft.com/office/drawing/2014/main" id="{298B150E-0CF7-45BD-B0D0-79F2C3F08011}"/>
+                <a16:creationId xmlns:a16="http://schemas.microsoft.com/office/drawing/2014/main" id="{9B370848-1C1E-4DB2-B2C1-64EEF7BBE541}"/>
               </a:ext>
             </a:extLst>
           </p:cNvPr>
@@ -3621,7 +3621,7 @@
           <p:cNvPr id="7" name="">
             <a:extLst xmlns:a="http://schemas.openxmlformats.org/drawingml/2006/main">
               <a:ext uri="{FF2B5EF4-FFF2-40B4-BE49-F238E27FC236}">
-                <a16:creationId xmlns:a16="http://schemas.microsoft.com/office/drawing/2014/main" id="{46ECC4A3-7B35-4525-BA7F-D4ACCF6938EE}"/>
+                <a16:creationId xmlns:a16="http://schemas.microsoft.com/office/drawing/2014/main" id="{0588EEE8-4A5A-451F-9CD6-9CB40B91B3B1}"/>
               </a:ext>
             </a:extLst>
           </p:cNvPr>
@@ -3654,7 +3654,7 @@
           <p:cNvPr id="8" name="">
             <a:extLst xmlns:a="http://schemas.openxmlformats.org/drawingml/2006/main">
               <a:ext uri="{FF2B5EF4-FFF2-40B4-BE49-F238E27FC236}">
-                <a16:creationId xmlns:a16="http://schemas.microsoft.com/office/drawing/2014/main" id="{2B5AAD59-FEAC-49CF-ACFD-AF8D56B4B9CF}"/>
+                <a16:creationId xmlns:a16="http://schemas.microsoft.com/office/drawing/2014/main" id="{587C0B06-09F9-4CAF-BA89-CDA455EA5B07}"/>
               </a:ext>
             </a:extLst>
           </p:cNvPr>
@@ -3704,7 +3704,7 @@
           <p:cNvPr id="9" name="">
             <a:extLst xmlns:a="http://schemas.openxmlformats.org/drawingml/2006/main">
               <a:ext uri="{FF2B5EF4-FFF2-40B4-BE49-F238E27FC236}">
-                <a16:creationId xmlns:a16="http://schemas.microsoft.com/office/drawing/2014/main" id="{CD8CB2E6-5139-4AF3-853B-15359ABBC905}"/>
+                <a16:creationId xmlns:a16="http://schemas.microsoft.com/office/drawing/2014/main" id="{496FAC4D-EC25-4528-A9A2-CF573DE67BBA}"/>
               </a:ext>
             </a:extLst>
           </p:cNvPr>
@@ -3754,7 +3754,7 @@
           <p:cNvPr id="10" name="">
             <a:extLst xmlns:a="http://schemas.openxmlformats.org/drawingml/2006/main">
               <a:ext uri="{FF2B5EF4-FFF2-40B4-BE49-F238E27FC236}">
-                <a16:creationId xmlns:a16="http://schemas.microsoft.com/office/drawing/2014/main" id="{44FBD446-A8E2-4182-A78A-B904BCFACB56}"/>
+                <a16:creationId xmlns:a16="http://schemas.microsoft.com/office/drawing/2014/main" id="{04AC086F-DFDB-4D7F-A560-DA6B3C92D36F}"/>
               </a:ext>
             </a:extLst>
           </p:cNvPr>
@@ -3787,7 +3787,7 @@
           <p:cNvPr id="11" name="">
             <a:extLst xmlns:a="http://schemas.openxmlformats.org/drawingml/2006/main">
               <a:ext uri="{FF2B5EF4-FFF2-40B4-BE49-F238E27FC236}">
-                <a16:creationId xmlns:a16="http://schemas.microsoft.com/office/drawing/2014/main" id="{A6094F2A-F72F-44AE-BF5E-537A722BD332}"/>
+                <a16:creationId xmlns:a16="http://schemas.microsoft.com/office/drawing/2014/main" id="{73CCAACA-CD01-4839-9C86-F13392A6ACF6}"/>
               </a:ext>
             </a:extLst>
           </p:cNvPr>
@@ -3837,7 +3837,7 @@
           <p:cNvPr id="12" name="">
             <a:extLst xmlns:a="http://schemas.openxmlformats.org/drawingml/2006/main">
               <a:ext uri="{FF2B5EF4-FFF2-40B4-BE49-F238E27FC236}">
-                <a16:creationId xmlns:a16="http://schemas.microsoft.com/office/drawing/2014/main" id="{47E869C1-5AAE-41F4-9CEB-51F61046B8F1}"/>
+                <a16:creationId xmlns:a16="http://schemas.microsoft.com/office/drawing/2014/main" id="{BDAE63EF-5979-406D-A47F-CAA4D876F0D8}"/>
               </a:ext>
             </a:extLst>
           </p:cNvPr>
@@ -3887,7 +3887,7 @@
           <p:cNvPr id="13" name="">
             <a:extLst xmlns:a="http://schemas.openxmlformats.org/drawingml/2006/main">
               <a:ext uri="{FF2B5EF4-FFF2-40B4-BE49-F238E27FC236}">
-                <a16:creationId xmlns:a16="http://schemas.microsoft.com/office/drawing/2014/main" id="{1FEAE075-6E4F-4F5F-8450-394A5CFF952E}"/>
+                <a16:creationId xmlns:a16="http://schemas.microsoft.com/office/drawing/2014/main" id="{34405EAD-F1D3-463E-A155-A075A032BD3D}"/>
               </a:ext>
             </a:extLst>
           </p:cNvPr>
@@ -3920,7 +3920,7 @@
           <p:cNvPr id="14" name="">
             <a:extLst xmlns:a="http://schemas.openxmlformats.org/drawingml/2006/main">
               <a:ext uri="{FF2B5EF4-FFF2-40B4-BE49-F238E27FC236}">
-                <a16:creationId xmlns:a16="http://schemas.microsoft.com/office/drawing/2014/main" id="{F9037E87-3B8F-4F02-89E3-6E4119B1D1B2}"/>
+                <a16:creationId xmlns:a16="http://schemas.microsoft.com/office/drawing/2014/main" id="{E2174843-D347-4207-BF05-FBE6777ABA28}"/>
               </a:ext>
             </a:extLst>
           </p:cNvPr>
@@ -3970,7 +3970,7 @@
           <p:cNvPr id="15" name="">
             <a:extLst xmlns:a="http://schemas.openxmlformats.org/drawingml/2006/main">
               <a:ext uri="{FF2B5EF4-FFF2-40B4-BE49-F238E27FC236}">
-                <a16:creationId xmlns:a16="http://schemas.microsoft.com/office/drawing/2014/main" id="{895D93C0-FE82-4C46-9046-0D5864E81483}"/>
+                <a16:creationId xmlns:a16="http://schemas.microsoft.com/office/drawing/2014/main" id="{2D6AE6DC-AA78-4761-A754-7CC57B49965A}"/>
               </a:ext>
             </a:extLst>
           </p:cNvPr>
@@ -4020,7 +4020,7 @@
           <p:cNvPr id="16" name="">
             <a:extLst xmlns:a="http://schemas.openxmlformats.org/drawingml/2006/main">
               <a:ext uri="{FF2B5EF4-FFF2-40B4-BE49-F238E27FC236}">
-                <a16:creationId xmlns:a16="http://schemas.microsoft.com/office/drawing/2014/main" id="{089BA928-936E-4870-AA11-1B1D2E91C0ED}"/>
+                <a16:creationId xmlns:a16="http://schemas.microsoft.com/office/drawing/2014/main" id="{37EEA85F-4068-4001-B177-1B1808EEB3F8}"/>
               </a:ext>
             </a:extLst>
           </p:cNvPr>
@@ -4053,7 +4053,7 @@
           <p:cNvPr id="17" name="">
             <a:extLst xmlns:a="http://schemas.openxmlformats.org/drawingml/2006/main">
               <a:ext uri="{FF2B5EF4-FFF2-40B4-BE49-F238E27FC236}">
-                <a16:creationId xmlns:a16="http://schemas.microsoft.com/office/drawing/2014/main" id="{5FAB3A4C-68E7-42EA-8FDD-F470D58E269A}"/>
+                <a16:creationId xmlns:a16="http://schemas.microsoft.com/office/drawing/2014/main" id="{821AFBB8-ECE4-46D6-B7AA-D24243B5104F}"/>
               </a:ext>
             </a:extLst>
           </p:cNvPr>
@@ -4103,7 +4103,7 @@
           <p:cNvPr id="18" name="">
             <a:extLst xmlns:a="http://schemas.openxmlformats.org/drawingml/2006/main">
               <a:ext uri="{FF2B5EF4-FFF2-40B4-BE49-F238E27FC236}">
-                <a16:creationId xmlns:a16="http://schemas.microsoft.com/office/drawing/2014/main" id="{45520A38-C0C4-4475-8691-D151C6B06279}"/>
+                <a16:creationId xmlns:a16="http://schemas.microsoft.com/office/drawing/2014/main" id="{2EA8C65D-8BBB-455F-930D-D2C8003300E2}"/>
               </a:ext>
             </a:extLst>
           </p:cNvPr>
@@ -4153,7 +4153,7 @@
           <p:cNvPr id="19" name="">
             <a:extLst xmlns:a="http://schemas.openxmlformats.org/drawingml/2006/main">
               <a:ext uri="{FF2B5EF4-FFF2-40B4-BE49-F238E27FC236}">
-                <a16:creationId xmlns:a16="http://schemas.microsoft.com/office/drawing/2014/main" id="{E185C9DA-9801-4F34-A976-E207406CB9F7}"/>
+                <a16:creationId xmlns:a16="http://schemas.microsoft.com/office/drawing/2014/main" id="{4876B407-9CC6-4A05-B8FA-74732779381B}"/>
               </a:ext>
             </a:extLst>
           </p:cNvPr>
@@ -4188,7 +4188,7 @@
           <p:cNvPr id="20" name="">
             <a:extLst xmlns:a="http://schemas.openxmlformats.org/drawingml/2006/main">
               <a:ext uri="{FF2B5EF4-FFF2-40B4-BE49-F238E27FC236}">
-                <a16:creationId xmlns:a16="http://schemas.microsoft.com/office/drawing/2014/main" id="{F51BC851-194A-45E5-8535-3B5D8BF7D784}"/>
+                <a16:creationId xmlns:a16="http://schemas.microsoft.com/office/drawing/2014/main" id="{3CE147C2-6179-4E1F-922E-453DB61C5DE2}"/>
               </a:ext>
             </a:extLst>
           </p:cNvPr>
@@ -4221,7 +4221,7 @@
           <p:cNvPr id="21" name="">
             <a:extLst xmlns:a="http://schemas.openxmlformats.org/drawingml/2006/main">
               <a:ext uri="{FF2B5EF4-FFF2-40B4-BE49-F238E27FC236}">
-                <a16:creationId xmlns:a16="http://schemas.microsoft.com/office/drawing/2014/main" id="{1B1365A3-6039-44A0-9F24-C4F023CA21F4}"/>
+                <a16:creationId xmlns:a16="http://schemas.microsoft.com/office/drawing/2014/main" id="{BACE39D4-9826-4D32-A369-F506955E5DE9}"/>
               </a:ext>
             </a:extLst>
           </p:cNvPr>
@@ -4271,7 +4271,7 @@
           <p:cNvPr id="22" name="">
             <a:extLst xmlns:a="http://schemas.openxmlformats.org/drawingml/2006/main">
               <a:ext uri="{FF2B5EF4-FFF2-40B4-BE49-F238E27FC236}">
-                <a16:creationId xmlns:a16="http://schemas.microsoft.com/office/drawing/2014/main" id="{72FAC349-87F8-4CBC-A189-8037D18C7CB0}"/>
+                <a16:creationId xmlns:a16="http://schemas.microsoft.com/office/drawing/2014/main" id="{7D4B127F-6F1B-4E25-9CB1-EFF796D95F63}"/>
               </a:ext>
             </a:extLst>
           </p:cNvPr>
@@ -4355,7 +4355,7 @@
           <p:cNvPr id="23" name="">
             <a:extLst xmlns:a="http://schemas.openxmlformats.org/drawingml/2006/main">
               <a:ext uri="{FF2B5EF4-FFF2-40B4-BE49-F238E27FC236}">
-                <a16:creationId xmlns:a16="http://schemas.microsoft.com/office/drawing/2014/main" id="{38418B45-D724-4478-88BA-7B331589E06F}"/>
+                <a16:creationId xmlns:a16="http://schemas.microsoft.com/office/drawing/2014/main" id="{A550023E-3FF6-4055-A130-D5EFCD12A153}"/>
               </a:ext>
             </a:extLst>
           </p:cNvPr>
@@ -4403,7 +4403,7 @@
     </p:spTree>
     <p:extLst>
       <p:ext uri="{BB962C8B-B14F-4D97-AF65-F5344CB8AC3E}">
-        <p14:creationId xmlns:p14="http://schemas.microsoft.com/office/powerpoint/2010/main" val="916673903"/>
+        <p14:creationId xmlns:p14="http://schemas.microsoft.com/office/powerpoint/2010/main" val="473600521"/>
       </p:ext>
     </p:extLst>
   </p:cSld>
@@ -4434,7 +4434,7 @@
           <p:cNvPr id="34" name="">
             <a:extLst xmlns:a="http://schemas.openxmlformats.org/drawingml/2006/main">
               <a:ext uri="{FF2B5EF4-FFF2-40B4-BE49-F238E27FC236}">
-                <a16:creationId xmlns:a16="http://schemas.microsoft.com/office/drawing/2014/main" id="{2EABBFF4-79C3-481D-8F18-066F2ED0CDAF}"/>
+                <a16:creationId xmlns:a16="http://schemas.microsoft.com/office/drawing/2014/main" id="{169411B1-34DB-43D0-84C8-97243E586BDB}"/>
               </a:ext>
             </a:extLst>
           </p:cNvPr>
@@ -4465,7 +4465,7 @@
           <p:cNvPr id="2" name="">
             <a:extLst xmlns:a="http://schemas.openxmlformats.org/drawingml/2006/main">
               <a:ext uri="{FF2B5EF4-FFF2-40B4-BE49-F238E27FC236}">
-                <a16:creationId xmlns:a16="http://schemas.microsoft.com/office/drawing/2014/main" id="{B2EB299C-3E6A-45F5-B9CC-2043B7914875}"/>
+                <a16:creationId xmlns:a16="http://schemas.microsoft.com/office/drawing/2014/main" id="{2BC0E94B-0C54-4349-9899-925AAAF9CED3}"/>
               </a:ext>
             </a:extLst>
           </p:cNvPr>
@@ -4515,7 +4515,7 @@
           <p:cNvPr id="3" name="">
             <a:extLst xmlns:a="http://schemas.openxmlformats.org/drawingml/2006/main">
               <a:ext uri="{FF2B5EF4-FFF2-40B4-BE49-F238E27FC236}">
-                <a16:creationId xmlns:a16="http://schemas.microsoft.com/office/drawing/2014/main" id="{96F87D2F-D934-46EE-BF4C-EDEF36822ADE}"/>
+                <a16:creationId xmlns:a16="http://schemas.microsoft.com/office/drawing/2014/main" id="{D91952FF-43A1-4887-B7FA-6FA4FAFFDD73}"/>
               </a:ext>
             </a:extLst>
           </p:cNvPr>
@@ -4565,7 +4565,7 @@
           <p:cNvPr id="4" name="">
             <a:extLst xmlns:a="http://schemas.openxmlformats.org/drawingml/2006/main">
               <a:ext uri="{FF2B5EF4-FFF2-40B4-BE49-F238E27FC236}">
-                <a16:creationId xmlns:a16="http://schemas.microsoft.com/office/drawing/2014/main" id="{080A7123-6A1E-41C1-AD78-1821F654BB2B}"/>
+                <a16:creationId xmlns:a16="http://schemas.microsoft.com/office/drawing/2014/main" id="{3812DC68-EC0B-4B2D-B0B9-A803C9809761}"/>
               </a:ext>
             </a:extLst>
           </p:cNvPr>
@@ -4596,7 +4596,7 @@
           <p:cNvPr id="5" name="">
             <a:extLst xmlns:a="http://schemas.openxmlformats.org/drawingml/2006/main">
               <a:ext uri="{FF2B5EF4-FFF2-40B4-BE49-F238E27FC236}">
-                <a16:creationId xmlns:a16="http://schemas.microsoft.com/office/drawing/2014/main" id="{68B47AA2-A05D-43B4-9814-B77267559F1E}"/>
+                <a16:creationId xmlns:a16="http://schemas.microsoft.com/office/drawing/2014/main" id="{E3A34B84-B7DE-4C57-950C-8E6DA73E2834}"/>
               </a:ext>
             </a:extLst>
           </p:cNvPr>
@@ -4646,7 +4646,7 @@
           <p:cNvPr id="6" name="">
             <a:extLst xmlns:a="http://schemas.openxmlformats.org/drawingml/2006/main">
               <a:ext uri="{FF2B5EF4-FFF2-40B4-BE49-F238E27FC236}">
-                <a16:creationId xmlns:a16="http://schemas.microsoft.com/office/drawing/2014/main" id="{F73FC06E-7804-45A1-AFF1-6B11ECF7794A}"/>
+                <a16:creationId xmlns:a16="http://schemas.microsoft.com/office/drawing/2014/main" id="{09ACA2CD-2B8A-4388-854E-383D1BCDAC37}"/>
               </a:ext>
             </a:extLst>
           </p:cNvPr>
@@ -4696,7 +4696,7 @@
           <p:cNvPr id="7" name="">
             <a:extLst xmlns:a="http://schemas.openxmlformats.org/drawingml/2006/main">
               <a:ext uri="{FF2B5EF4-FFF2-40B4-BE49-F238E27FC236}">
-                <a16:creationId xmlns:a16="http://schemas.microsoft.com/office/drawing/2014/main" id="{6B73E35B-D267-41A9-A337-04F970DC03BA}"/>
+                <a16:creationId xmlns:a16="http://schemas.microsoft.com/office/drawing/2014/main" id="{3966666B-AFEF-4ABA-939C-33F472DEAD6E}"/>
               </a:ext>
             </a:extLst>
           </p:cNvPr>
@@ -4729,7 +4729,7 @@
           <p:cNvPr id="8" name="">
             <a:extLst xmlns:a="http://schemas.openxmlformats.org/drawingml/2006/main">
               <a:ext uri="{FF2B5EF4-FFF2-40B4-BE49-F238E27FC236}">
-                <a16:creationId xmlns:a16="http://schemas.microsoft.com/office/drawing/2014/main" id="{BB35E188-E96F-4F20-9FB0-5F74B8CDC2F1}"/>
+                <a16:creationId xmlns:a16="http://schemas.microsoft.com/office/drawing/2014/main" id="{88F103F3-67C6-4DA4-96EA-840A9CAC65D2}"/>
               </a:ext>
             </a:extLst>
           </p:cNvPr>
@@ -4779,7 +4779,7 @@
           <p:cNvPr id="9" name="">
             <a:extLst xmlns:a="http://schemas.openxmlformats.org/drawingml/2006/main">
               <a:ext uri="{FF2B5EF4-FFF2-40B4-BE49-F238E27FC236}">
-                <a16:creationId xmlns:a16="http://schemas.microsoft.com/office/drawing/2014/main" id="{008755A6-3DF2-43B7-AB1B-A1AA904B41E5}"/>
+                <a16:creationId xmlns:a16="http://schemas.microsoft.com/office/drawing/2014/main" id="{7BEED20A-BDCB-4195-A651-F216DC8C39BE}"/>
               </a:ext>
             </a:extLst>
           </p:cNvPr>
@@ -4814,7 +4814,7 @@
           <p:cNvPr id="10" name="">
             <a:extLst xmlns:a="http://schemas.openxmlformats.org/drawingml/2006/main">
               <a:ext uri="{FF2B5EF4-FFF2-40B4-BE49-F238E27FC236}">
-                <a16:creationId xmlns:a16="http://schemas.microsoft.com/office/drawing/2014/main" id="{2D3DD067-466F-4A31-9504-96126554D034}"/>
+                <a16:creationId xmlns:a16="http://schemas.microsoft.com/office/drawing/2014/main" id="{4E925E1E-D3D4-4A20-8E92-56D177DC2B01}"/>
               </a:ext>
             </a:extLst>
           </p:cNvPr>
@@ -4864,7 +4864,7 @@
           <p:cNvPr id="11" name="">
             <a:extLst xmlns:a="http://schemas.openxmlformats.org/drawingml/2006/main">
               <a:ext uri="{FF2B5EF4-FFF2-40B4-BE49-F238E27FC236}">
-                <a16:creationId xmlns:a16="http://schemas.microsoft.com/office/drawing/2014/main" id="{316F8F5D-BD7E-4090-AD72-DCC9DAEC4AF6}"/>
+                <a16:creationId xmlns:a16="http://schemas.microsoft.com/office/drawing/2014/main" id="{238AF439-5486-423E-8F98-B8BD52D74BB2}"/>
               </a:ext>
             </a:extLst>
           </p:cNvPr>
@@ -4895,7 +4895,7 @@
           <p:cNvPr id="12" name="">
             <a:extLst xmlns:a="http://schemas.openxmlformats.org/drawingml/2006/main">
               <a:ext uri="{FF2B5EF4-FFF2-40B4-BE49-F238E27FC236}">
-                <a16:creationId xmlns:a16="http://schemas.microsoft.com/office/drawing/2014/main" id="{1B3BAE9F-F2BD-49E4-9E38-C9DFD6E7C7AD}"/>
+                <a16:creationId xmlns:a16="http://schemas.microsoft.com/office/drawing/2014/main" id="{6C9125A5-1248-4CDC-B0B1-8CAF00760EFC}"/>
               </a:ext>
             </a:extLst>
           </p:cNvPr>
@@ -5013,7 +5013,7 @@
           <p:cNvPr id="13" name="">
             <a:extLst xmlns:a="http://schemas.openxmlformats.org/drawingml/2006/main">
               <a:ext uri="{FF2B5EF4-FFF2-40B4-BE49-F238E27FC236}">
-                <a16:creationId xmlns:a16="http://schemas.microsoft.com/office/drawing/2014/main" id="{C572EA65-7C3A-4CA4-89BF-2ACC75ADDDE8}"/>
+                <a16:creationId xmlns:a16="http://schemas.microsoft.com/office/drawing/2014/main" id="{7CF25869-4E97-4F21-8988-8754ED5C619E}"/>
               </a:ext>
             </a:extLst>
           </p:cNvPr>
@@ -5048,7 +5048,7 @@
           <p:cNvPr id="14" name="">
             <a:extLst xmlns:a="http://schemas.openxmlformats.org/drawingml/2006/main">
               <a:ext uri="{FF2B5EF4-FFF2-40B4-BE49-F238E27FC236}">
-                <a16:creationId xmlns:a16="http://schemas.microsoft.com/office/drawing/2014/main" id="{49BE2499-C0A2-46F7-B4F3-037F1B9687D8}"/>
+                <a16:creationId xmlns:a16="http://schemas.microsoft.com/office/drawing/2014/main" id="{E68A8F6F-C6EF-4476-B9FC-AB58FA6E0A08}"/>
               </a:ext>
             </a:extLst>
           </p:cNvPr>
@@ -5081,7 +5081,7 @@
           <p:cNvPr id="15" name="">
             <a:extLst xmlns:a="http://schemas.openxmlformats.org/drawingml/2006/main">
               <a:ext uri="{FF2B5EF4-FFF2-40B4-BE49-F238E27FC236}">
-                <a16:creationId xmlns:a16="http://schemas.microsoft.com/office/drawing/2014/main" id="{59856E25-E0A0-4E09-AF1B-9DAC09D89B7D}"/>
+                <a16:creationId xmlns:a16="http://schemas.microsoft.com/office/drawing/2014/main" id="{416F42A1-DAE6-48EC-8C95-AABE74A82981}"/>
               </a:ext>
             </a:extLst>
           </p:cNvPr>
@@ -5131,7 +5131,7 @@
           <p:cNvPr id="16" name="">
             <a:extLst xmlns:a="http://schemas.openxmlformats.org/drawingml/2006/main">
               <a:ext uri="{FF2B5EF4-FFF2-40B4-BE49-F238E27FC236}">
-                <a16:creationId xmlns:a16="http://schemas.microsoft.com/office/drawing/2014/main" id="{081EA336-4DA0-422E-8DC7-8FBB1AE5C416}"/>
+                <a16:creationId xmlns:a16="http://schemas.microsoft.com/office/drawing/2014/main" id="{F5164B80-517C-47F1-AEDE-938984721BBD}"/>
               </a:ext>
             </a:extLst>
           </p:cNvPr>
@@ -5181,7 +5181,7 @@
           <p:cNvPr id="17" name="">
             <a:extLst xmlns:a="http://schemas.openxmlformats.org/drawingml/2006/main">
               <a:ext uri="{FF2B5EF4-FFF2-40B4-BE49-F238E27FC236}">
-                <a16:creationId xmlns:a16="http://schemas.microsoft.com/office/drawing/2014/main" id="{47A6DD04-CF2A-4CF1-ACFC-24EA53491732}"/>
+                <a16:creationId xmlns:a16="http://schemas.microsoft.com/office/drawing/2014/main" id="{76AA76A6-35BC-4760-9658-7D8D5C8821A3}"/>
               </a:ext>
             </a:extLst>
           </p:cNvPr>
@@ -5216,7 +5216,7 @@
           <p:cNvPr id="18" name="">
             <a:extLst xmlns:a="http://schemas.openxmlformats.org/drawingml/2006/main">
               <a:ext uri="{FF2B5EF4-FFF2-40B4-BE49-F238E27FC236}">
-                <a16:creationId xmlns:a16="http://schemas.microsoft.com/office/drawing/2014/main" id="{9017DF5C-CAA2-4538-9942-5029D86D7721}"/>
+                <a16:creationId xmlns:a16="http://schemas.microsoft.com/office/drawing/2014/main" id="{34B879AE-F942-4C22-8B32-29A67BC6780B}"/>
               </a:ext>
             </a:extLst>
           </p:cNvPr>
@@ -5249,7 +5249,7 @@
           <p:cNvPr id="19" name="">
             <a:extLst xmlns:a="http://schemas.openxmlformats.org/drawingml/2006/main">
               <a:ext uri="{FF2B5EF4-FFF2-40B4-BE49-F238E27FC236}">
-                <a16:creationId xmlns:a16="http://schemas.microsoft.com/office/drawing/2014/main" id="{DDAAE446-75CE-43DB-A0BB-A39BEA7FA5ED}"/>
+                <a16:creationId xmlns:a16="http://schemas.microsoft.com/office/drawing/2014/main" id="{643C4B67-AF60-4881-8061-DE6C0774CBFB}"/>
               </a:ext>
             </a:extLst>
           </p:cNvPr>
@@ -5299,7 +5299,7 @@
           <p:cNvPr id="20" name="">
             <a:extLst xmlns:a="http://schemas.openxmlformats.org/drawingml/2006/main">
               <a:ext uri="{FF2B5EF4-FFF2-40B4-BE49-F238E27FC236}">
-                <a16:creationId xmlns:a16="http://schemas.microsoft.com/office/drawing/2014/main" id="{0CF50B34-B02F-4B58-9A78-F2354EE58CF8}"/>
+                <a16:creationId xmlns:a16="http://schemas.microsoft.com/office/drawing/2014/main" id="{D4BD52A3-A13C-42DA-932F-BB481A344BF0}"/>
               </a:ext>
             </a:extLst>
           </p:cNvPr>
@@ -5349,7 +5349,7 @@
           <p:cNvPr id="21" name="">
             <a:extLst xmlns:a="http://schemas.openxmlformats.org/drawingml/2006/main">
               <a:ext uri="{FF2B5EF4-FFF2-40B4-BE49-F238E27FC236}">
-                <a16:creationId xmlns:a16="http://schemas.microsoft.com/office/drawing/2014/main" id="{9C4B3D5D-B659-40EE-8AA6-C999A8DB1DBC}"/>
+                <a16:creationId xmlns:a16="http://schemas.microsoft.com/office/drawing/2014/main" id="{EBC3530C-237B-440B-984E-212934DBBE7B}"/>
               </a:ext>
             </a:extLst>
           </p:cNvPr>
@@ -5384,7 +5384,7 @@
           <p:cNvPr id="22" name="">
             <a:extLst xmlns:a="http://schemas.openxmlformats.org/drawingml/2006/main">
               <a:ext uri="{FF2B5EF4-FFF2-40B4-BE49-F238E27FC236}">
-                <a16:creationId xmlns:a16="http://schemas.microsoft.com/office/drawing/2014/main" id="{BEB432F7-4B70-4D78-82BD-722A47DDF7DE}"/>
+                <a16:creationId xmlns:a16="http://schemas.microsoft.com/office/drawing/2014/main" id="{933A2654-5884-4FD3-A8D3-41342AF84A44}"/>
               </a:ext>
             </a:extLst>
           </p:cNvPr>
@@ -5417,7 +5417,7 @@
           <p:cNvPr id="23" name="">
             <a:extLst xmlns:a="http://schemas.openxmlformats.org/drawingml/2006/main">
               <a:ext uri="{FF2B5EF4-FFF2-40B4-BE49-F238E27FC236}">
-                <a16:creationId xmlns:a16="http://schemas.microsoft.com/office/drawing/2014/main" id="{CD022D0C-A3A0-4707-94D5-CA01286093C6}"/>
+                <a16:creationId xmlns:a16="http://schemas.microsoft.com/office/drawing/2014/main" id="{ABA87E5D-CA7A-43FD-838B-506FC019E19D}"/>
               </a:ext>
             </a:extLst>
           </p:cNvPr>
@@ -5467,7 +5467,7 @@
           <p:cNvPr id="24" name="">
             <a:extLst xmlns:a="http://schemas.openxmlformats.org/drawingml/2006/main">
               <a:ext uri="{FF2B5EF4-FFF2-40B4-BE49-F238E27FC236}">
-                <a16:creationId xmlns:a16="http://schemas.microsoft.com/office/drawing/2014/main" id="{0E599F06-4E7A-4EC0-96FB-21D51D64A70E}"/>
+                <a16:creationId xmlns:a16="http://schemas.microsoft.com/office/drawing/2014/main" id="{B0186FF3-C355-4EA3-801F-79E17DF2096F}"/>
               </a:ext>
             </a:extLst>
           </p:cNvPr>
@@ -5517,7 +5517,7 @@
           <p:cNvPr id="25" name="">
             <a:extLst xmlns:a="http://schemas.openxmlformats.org/drawingml/2006/main">
               <a:ext uri="{FF2B5EF4-FFF2-40B4-BE49-F238E27FC236}">
-                <a16:creationId xmlns:a16="http://schemas.microsoft.com/office/drawing/2014/main" id="{F18492EB-FF52-4030-9323-893A2760149B}"/>
+                <a16:creationId xmlns:a16="http://schemas.microsoft.com/office/drawing/2014/main" id="{FFC1FEB3-9F7B-4C1E-BEDF-39049579A693}"/>
               </a:ext>
             </a:extLst>
           </p:cNvPr>
@@ -5552,7 +5552,7 @@
           <p:cNvPr id="26" name="">
             <a:extLst xmlns:a="http://schemas.openxmlformats.org/drawingml/2006/main">
               <a:ext uri="{FF2B5EF4-FFF2-40B4-BE49-F238E27FC236}">
-                <a16:creationId xmlns:a16="http://schemas.microsoft.com/office/drawing/2014/main" id="{4C7A2606-05C7-4C14-BEE8-095B581F9403}"/>
+                <a16:creationId xmlns:a16="http://schemas.microsoft.com/office/drawing/2014/main" id="{D27B776B-2D60-4BD7-A787-0655C75944EA}"/>
               </a:ext>
             </a:extLst>
           </p:cNvPr>
@@ -5585,7 +5585,7 @@
           <p:cNvPr id="27" name="">
             <a:extLst xmlns:a="http://schemas.openxmlformats.org/drawingml/2006/main">
               <a:ext uri="{FF2B5EF4-FFF2-40B4-BE49-F238E27FC236}">
-                <a16:creationId xmlns:a16="http://schemas.microsoft.com/office/drawing/2014/main" id="{1FB03C80-CDB3-42AC-8676-996539CF4BD7}"/>
+                <a16:creationId xmlns:a16="http://schemas.microsoft.com/office/drawing/2014/main" id="{69171A9A-E438-4FD8-A42B-9B7784CAF65C}"/>
               </a:ext>
             </a:extLst>
           </p:cNvPr>
@@ -5635,7 +5635,7 @@
           <p:cNvPr id="28" name="">
             <a:extLst xmlns:a="http://schemas.openxmlformats.org/drawingml/2006/main">
               <a:ext uri="{FF2B5EF4-FFF2-40B4-BE49-F238E27FC236}">
-                <a16:creationId xmlns:a16="http://schemas.microsoft.com/office/drawing/2014/main" id="{B671EED7-F6F4-49AA-88A3-988E1D005A67}"/>
+                <a16:creationId xmlns:a16="http://schemas.microsoft.com/office/drawing/2014/main" id="{ADB13C1D-CA6B-4E7E-B5DE-C2EC17B01DC6}"/>
               </a:ext>
             </a:extLst>
           </p:cNvPr>
@@ -5797,7 +5797,7 @@
           <p:cNvPr id="33" name="">
             <a:extLst xmlns:a="http://schemas.openxmlformats.org/drawingml/2006/main">
               <a:ext uri="{FF2B5EF4-FFF2-40B4-BE49-F238E27FC236}">
-                <a16:creationId xmlns:a16="http://schemas.microsoft.com/office/drawing/2014/main" id="{7E4233BD-50F0-4A6F-8B6A-E80C49F32B56}"/>
+                <a16:creationId xmlns:a16="http://schemas.microsoft.com/office/drawing/2014/main" id="{D370418C-E241-4DDD-9276-2805E76E980F}"/>
               </a:ext>
             </a:extLst>
           </p:cNvPr>
@@ -5845,7 +5845,7 @@
     </p:spTree>
     <p:extLst>
       <p:ext uri="{BB962C8B-B14F-4D97-AF65-F5344CB8AC3E}">
-        <p14:creationId xmlns:p14="http://schemas.microsoft.com/office/powerpoint/2010/main" val="930138790"/>
+        <p14:creationId xmlns:p14="http://schemas.microsoft.com/office/powerpoint/2010/main" val="2046087381"/>
       </p:ext>
     </p:extLst>
   </p:cSld>
@@ -5876,7 +5876,7 @@
           <p:cNvPr id="29" name="">
             <a:extLst xmlns:a="http://schemas.openxmlformats.org/drawingml/2006/main">
               <a:ext uri="{FF2B5EF4-FFF2-40B4-BE49-F238E27FC236}">
-                <a16:creationId xmlns:a16="http://schemas.microsoft.com/office/drawing/2014/main" id="{8960E7EF-2A3F-49B0-A5A4-33CDA9D20F18}"/>
+                <a16:creationId xmlns:a16="http://schemas.microsoft.com/office/drawing/2014/main" id="{ED28454D-F61D-43FC-8FF9-743323144F4B}"/>
               </a:ext>
             </a:extLst>
           </p:cNvPr>
@@ -5907,7 +5907,7 @@
           <p:cNvPr id="2" name="">
             <a:extLst xmlns:a="http://schemas.openxmlformats.org/drawingml/2006/main">
               <a:ext uri="{FF2B5EF4-FFF2-40B4-BE49-F238E27FC236}">
-                <a16:creationId xmlns:a16="http://schemas.microsoft.com/office/drawing/2014/main" id="{BD1B5C45-F748-4603-BF35-3BFAF09ACA7B}"/>
+                <a16:creationId xmlns:a16="http://schemas.microsoft.com/office/drawing/2014/main" id="{42251E3B-CA6C-4B73-9170-A673989A1B0D}"/>
               </a:ext>
             </a:extLst>
           </p:cNvPr>
@@ -5957,7 +5957,7 @@
           <p:cNvPr id="3" name="">
             <a:extLst xmlns:a="http://schemas.openxmlformats.org/drawingml/2006/main">
               <a:ext uri="{FF2B5EF4-FFF2-40B4-BE49-F238E27FC236}">
-                <a16:creationId xmlns:a16="http://schemas.microsoft.com/office/drawing/2014/main" id="{31B18DCF-4905-44EF-AC80-4CC2FB16B553}"/>
+                <a16:creationId xmlns:a16="http://schemas.microsoft.com/office/drawing/2014/main" id="{3543FFC2-EB6C-40D6-8D3D-3CFAE96EED95}"/>
               </a:ext>
             </a:extLst>
           </p:cNvPr>
@@ -6007,7 +6007,7 @@
           <p:cNvPr id="4" name="">
             <a:extLst xmlns:a="http://schemas.openxmlformats.org/drawingml/2006/main">
               <a:ext uri="{FF2B5EF4-FFF2-40B4-BE49-F238E27FC236}">
-                <a16:creationId xmlns:a16="http://schemas.microsoft.com/office/drawing/2014/main" id="{1F4BFB95-92B3-49E8-88A8-93E480B7C707}"/>
+                <a16:creationId xmlns:a16="http://schemas.microsoft.com/office/drawing/2014/main" id="{5B65D545-94FC-4AB9-81A4-8AD26FA32F94}"/>
               </a:ext>
             </a:extLst>
           </p:cNvPr>
@@ -6038,7 +6038,7 @@
           <p:cNvPr id="5" name="">
             <a:extLst xmlns:a="http://schemas.openxmlformats.org/drawingml/2006/main">
               <a:ext uri="{FF2B5EF4-FFF2-40B4-BE49-F238E27FC236}">
-                <a16:creationId xmlns:a16="http://schemas.microsoft.com/office/drawing/2014/main" id="{27FAF0DD-B72A-486B-BEEF-EBD167C2AA5F}"/>
+                <a16:creationId xmlns:a16="http://schemas.microsoft.com/office/drawing/2014/main" id="{9059FC96-2608-494F-9314-EBB5070811CE}"/>
               </a:ext>
             </a:extLst>
           </p:cNvPr>
@@ -6088,7 +6088,7 @@
           <p:cNvPr id="6" name="">
             <a:extLst xmlns:a="http://schemas.openxmlformats.org/drawingml/2006/main">
               <a:ext uri="{FF2B5EF4-FFF2-40B4-BE49-F238E27FC236}">
-                <a16:creationId xmlns:a16="http://schemas.microsoft.com/office/drawing/2014/main" id="{A76FBE2E-B913-42EA-9073-5E20A20F9DCD}"/>
+                <a16:creationId xmlns:a16="http://schemas.microsoft.com/office/drawing/2014/main" id="{3D15006D-7421-4D16-8D49-C4FF24A8AAB1}"/>
               </a:ext>
             </a:extLst>
           </p:cNvPr>
@@ -6138,7 +6138,7 @@
           <p:cNvPr id="7" name="">
             <a:extLst xmlns:a="http://schemas.openxmlformats.org/drawingml/2006/main">
               <a:ext uri="{FF2B5EF4-FFF2-40B4-BE49-F238E27FC236}">
-                <a16:creationId xmlns:a16="http://schemas.microsoft.com/office/drawing/2014/main" id="{CF977338-A83A-40BD-B145-D07996186881}"/>
+                <a16:creationId xmlns:a16="http://schemas.microsoft.com/office/drawing/2014/main" id="{0E62FE81-0537-4385-8F9F-437BFEAD686A}"/>
               </a:ext>
             </a:extLst>
           </p:cNvPr>
@@ -6171,7 +6171,7 @@
           <p:cNvPr id="8" name="">
             <a:extLst xmlns:a="http://schemas.openxmlformats.org/drawingml/2006/main">
               <a:ext uri="{FF2B5EF4-FFF2-40B4-BE49-F238E27FC236}">
-                <a16:creationId xmlns:a16="http://schemas.microsoft.com/office/drawing/2014/main" id="{F2C7DFBD-81F2-4C33-A7EB-E63420C1BDFB}"/>
+                <a16:creationId xmlns:a16="http://schemas.microsoft.com/office/drawing/2014/main" id="{492E9542-2752-4876-8FF8-9EE05F697972}"/>
               </a:ext>
             </a:extLst>
           </p:cNvPr>
@@ -6221,7 +6221,7 @@
           <p:cNvPr id="9" name="">
             <a:extLst xmlns:a="http://schemas.openxmlformats.org/drawingml/2006/main">
               <a:ext uri="{FF2B5EF4-FFF2-40B4-BE49-F238E27FC236}">
-                <a16:creationId xmlns:a16="http://schemas.microsoft.com/office/drawing/2014/main" id="{32051DED-6F54-4643-8C22-E1E80230C7AD}"/>
+                <a16:creationId xmlns:a16="http://schemas.microsoft.com/office/drawing/2014/main" id="{28A4C6B0-1103-4253-B572-E52B919E26CC}"/>
               </a:ext>
             </a:extLst>
           </p:cNvPr>
@@ -6256,7 +6256,7 @@
           <p:cNvPr id="10" name="">
             <a:extLst xmlns:a="http://schemas.openxmlformats.org/drawingml/2006/main">
               <a:ext uri="{FF2B5EF4-FFF2-40B4-BE49-F238E27FC236}">
-                <a16:creationId xmlns:a16="http://schemas.microsoft.com/office/drawing/2014/main" id="{E1C0046B-BE23-4F0C-A728-7BDBE8FEE804}"/>
+                <a16:creationId xmlns:a16="http://schemas.microsoft.com/office/drawing/2014/main" id="{8D800A2C-417B-468B-ADB2-5D007ED8E79D}"/>
               </a:ext>
             </a:extLst>
           </p:cNvPr>
@@ -6289,7 +6289,7 @@
           <p:cNvPr id="11" name="">
             <a:extLst xmlns:a="http://schemas.openxmlformats.org/drawingml/2006/main">
               <a:ext uri="{FF2B5EF4-FFF2-40B4-BE49-F238E27FC236}">
-                <a16:creationId xmlns:a16="http://schemas.microsoft.com/office/drawing/2014/main" id="{6956DBF4-560B-4EB5-8729-4065CE1C2FD1}"/>
+                <a16:creationId xmlns:a16="http://schemas.microsoft.com/office/drawing/2014/main" id="{A5920262-552E-49CA-B08E-1E2C9AFE21CD}"/>
               </a:ext>
             </a:extLst>
           </p:cNvPr>
@@ -6339,7 +6339,7 @@
           <p:cNvPr id="12" name="">
             <a:extLst xmlns:a="http://schemas.openxmlformats.org/drawingml/2006/main">
               <a:ext uri="{FF2B5EF4-FFF2-40B4-BE49-F238E27FC236}">
-                <a16:creationId xmlns:a16="http://schemas.microsoft.com/office/drawing/2014/main" id="{D8406732-B3F8-478A-8005-DF2CF21430F8}"/>
+                <a16:creationId xmlns:a16="http://schemas.microsoft.com/office/drawing/2014/main" id="{C8272246-9B65-4916-BF38-E9D84896BE6B}"/>
               </a:ext>
             </a:extLst>
           </p:cNvPr>
@@ -6389,7 +6389,7 @@
           <p:cNvPr id="13" name="">
             <a:extLst xmlns:a="http://schemas.openxmlformats.org/drawingml/2006/main">
               <a:ext uri="{FF2B5EF4-FFF2-40B4-BE49-F238E27FC236}">
-                <a16:creationId xmlns:a16="http://schemas.microsoft.com/office/drawing/2014/main" id="{6B7A66D4-93A3-46D4-9A28-57D09CE88334}"/>
+                <a16:creationId xmlns:a16="http://schemas.microsoft.com/office/drawing/2014/main" id="{4A2880BB-F873-46FE-BFB5-63BD0E6BCF1E}"/>
               </a:ext>
             </a:extLst>
           </p:cNvPr>
@@ -6473,7 +6473,7 @@
           <p:cNvPr id="14" name="">
             <a:extLst xmlns:a="http://schemas.openxmlformats.org/drawingml/2006/main">
               <a:ext uri="{FF2B5EF4-FFF2-40B4-BE49-F238E27FC236}">
-                <a16:creationId xmlns:a16="http://schemas.microsoft.com/office/drawing/2014/main" id="{39CE0705-21ED-4216-BA07-DF820CC488D1}"/>
+                <a16:creationId xmlns:a16="http://schemas.microsoft.com/office/drawing/2014/main" id="{10A09ACD-764E-4448-B113-659439381C45}"/>
               </a:ext>
             </a:extLst>
           </p:cNvPr>
@@ -6508,7 +6508,7 @@
           <p:cNvPr id="15" name="">
             <a:extLst xmlns:a="http://schemas.openxmlformats.org/drawingml/2006/main">
               <a:ext uri="{FF2B5EF4-FFF2-40B4-BE49-F238E27FC236}">
-                <a16:creationId xmlns:a16="http://schemas.microsoft.com/office/drawing/2014/main" id="{BE8A5CEE-39B5-433D-B8ED-33B195D9D542}"/>
+                <a16:creationId xmlns:a16="http://schemas.microsoft.com/office/drawing/2014/main" id="{8A58260D-D613-40C0-A370-BD4A3F450FA1}"/>
               </a:ext>
             </a:extLst>
           </p:cNvPr>
@@ -6541,7 +6541,7 @@
           <p:cNvPr id="16" name="">
             <a:extLst xmlns:a="http://schemas.openxmlformats.org/drawingml/2006/main">
               <a:ext uri="{FF2B5EF4-FFF2-40B4-BE49-F238E27FC236}">
-                <a16:creationId xmlns:a16="http://schemas.microsoft.com/office/drawing/2014/main" id="{A07A990E-0B8C-4ECC-8601-B18C9F6AAD3F}"/>
+                <a16:creationId xmlns:a16="http://schemas.microsoft.com/office/drawing/2014/main" id="{80090723-6AD3-4BE7-AA80-B331FC4BBFC8}"/>
               </a:ext>
             </a:extLst>
           </p:cNvPr>
@@ -6591,7 +6591,7 @@
           <p:cNvPr id="17" name="">
             <a:extLst xmlns:a="http://schemas.openxmlformats.org/drawingml/2006/main">
               <a:ext uri="{FF2B5EF4-FFF2-40B4-BE49-F238E27FC236}">
-                <a16:creationId xmlns:a16="http://schemas.microsoft.com/office/drawing/2014/main" id="{3924B130-398B-4FB1-B229-E95EB7FDE314}"/>
+                <a16:creationId xmlns:a16="http://schemas.microsoft.com/office/drawing/2014/main" id="{5302C3E1-AB7F-4AEB-854C-365FE4A7DFDB}"/>
               </a:ext>
             </a:extLst>
           </p:cNvPr>
@@ -6641,7 +6641,7 @@
           <p:cNvPr id="18" name="">
             <a:extLst xmlns:a="http://schemas.openxmlformats.org/drawingml/2006/main">
               <a:ext uri="{FF2B5EF4-FFF2-40B4-BE49-F238E27FC236}">
-                <a16:creationId xmlns:a16="http://schemas.microsoft.com/office/drawing/2014/main" id="{DC099C58-1380-4A72-A723-E71FC27B3FE6}"/>
+                <a16:creationId xmlns:a16="http://schemas.microsoft.com/office/drawing/2014/main" id="{E86DFD44-E3A7-45F0-ACD8-315A13CC61AE}"/>
               </a:ext>
             </a:extLst>
           </p:cNvPr>
@@ -6725,7 +6725,7 @@
           <p:cNvPr id="19" name="">
             <a:extLst xmlns:a="http://schemas.openxmlformats.org/drawingml/2006/main">
               <a:ext uri="{FF2B5EF4-FFF2-40B4-BE49-F238E27FC236}">
-                <a16:creationId xmlns:a16="http://schemas.microsoft.com/office/drawing/2014/main" id="{897F749C-75DD-493E-97FA-7890B41A1FF5}"/>
+                <a16:creationId xmlns:a16="http://schemas.microsoft.com/office/drawing/2014/main" id="{F0D2DC22-E5A4-4ABA-9311-6F97551DFE38}"/>
               </a:ext>
             </a:extLst>
           </p:cNvPr>
@@ -6760,7 +6760,7 @@
           <p:cNvPr id="20" name="">
             <a:extLst xmlns:a="http://schemas.openxmlformats.org/drawingml/2006/main">
               <a:ext uri="{FF2B5EF4-FFF2-40B4-BE49-F238E27FC236}">
-                <a16:creationId xmlns:a16="http://schemas.microsoft.com/office/drawing/2014/main" id="{586E6D6E-8E50-4D8C-A568-51C5FFBB0E40}"/>
+                <a16:creationId xmlns:a16="http://schemas.microsoft.com/office/drawing/2014/main" id="{19AC734F-F627-405A-B2A6-DA6FA11764D7}"/>
               </a:ext>
             </a:extLst>
           </p:cNvPr>
@@ -6793,7 +6793,7 @@
           <p:cNvPr id="21" name="">
             <a:extLst xmlns:a="http://schemas.openxmlformats.org/drawingml/2006/main">
               <a:ext uri="{FF2B5EF4-FFF2-40B4-BE49-F238E27FC236}">
-                <a16:creationId xmlns:a16="http://schemas.microsoft.com/office/drawing/2014/main" id="{11A95F7F-F233-40C3-B739-BB9A9158214B}"/>
+                <a16:creationId xmlns:a16="http://schemas.microsoft.com/office/drawing/2014/main" id="{ABE16902-B6B5-44CA-B546-4AC64D85351A}"/>
               </a:ext>
             </a:extLst>
           </p:cNvPr>
@@ -6843,7 +6843,7 @@
           <p:cNvPr id="22" name="">
             <a:extLst xmlns:a="http://schemas.openxmlformats.org/drawingml/2006/main">
               <a:ext uri="{FF2B5EF4-FFF2-40B4-BE49-F238E27FC236}">
-                <a16:creationId xmlns:a16="http://schemas.microsoft.com/office/drawing/2014/main" id="{DCB53766-9718-45AF-BAAC-B4ACBEB03D7F}"/>
+                <a16:creationId xmlns:a16="http://schemas.microsoft.com/office/drawing/2014/main" id="{9E17A7FC-E337-42E0-BDBC-EF17CB61CCAD}"/>
               </a:ext>
             </a:extLst>
           </p:cNvPr>
@@ -6893,7 +6893,7 @@
           <p:cNvPr id="23" name="">
             <a:extLst xmlns:a="http://schemas.openxmlformats.org/drawingml/2006/main">
               <a:ext uri="{FF2B5EF4-FFF2-40B4-BE49-F238E27FC236}">
-                <a16:creationId xmlns:a16="http://schemas.microsoft.com/office/drawing/2014/main" id="{B4293FC1-1E45-401A-94B0-8F562D0FC451}"/>
+                <a16:creationId xmlns:a16="http://schemas.microsoft.com/office/drawing/2014/main" id="{B6CDB9FB-7DC7-4F37-9914-2A1A313D04EE}"/>
               </a:ext>
             </a:extLst>
           </p:cNvPr>
@@ -6977,7 +6977,7 @@
           <p:cNvPr id="24" name="">
             <a:extLst xmlns:a="http://schemas.openxmlformats.org/drawingml/2006/main">
               <a:ext uri="{FF2B5EF4-FFF2-40B4-BE49-F238E27FC236}">
-                <a16:creationId xmlns:a16="http://schemas.microsoft.com/office/drawing/2014/main" id="{76D41D68-BE5C-4763-B5F1-2C12E7E4CAD7}"/>
+                <a16:creationId xmlns:a16="http://schemas.microsoft.com/office/drawing/2014/main" id="{5A80E0D6-14D5-4ED6-8B11-0DF75DB1FBFB}"/>
               </a:ext>
             </a:extLst>
           </p:cNvPr>
@@ -7012,7 +7012,7 @@
           <p:cNvPr id="25" name="">
             <a:extLst xmlns:a="http://schemas.openxmlformats.org/drawingml/2006/main">
               <a:ext uri="{FF2B5EF4-FFF2-40B4-BE49-F238E27FC236}">
-                <a16:creationId xmlns:a16="http://schemas.microsoft.com/office/drawing/2014/main" id="{E511BE16-F0A0-4FB7-82B2-60E6F915A1A6}"/>
+                <a16:creationId xmlns:a16="http://schemas.microsoft.com/office/drawing/2014/main" id="{EA0E1F3D-13A6-4C77-B3BE-F97F38964EC6}"/>
               </a:ext>
             </a:extLst>
           </p:cNvPr>
@@ -7045,7 +7045,7 @@
           <p:cNvPr id="26" name="">
             <a:extLst xmlns:a="http://schemas.openxmlformats.org/drawingml/2006/main">
               <a:ext uri="{FF2B5EF4-FFF2-40B4-BE49-F238E27FC236}">
-                <a16:creationId xmlns:a16="http://schemas.microsoft.com/office/drawing/2014/main" id="{F9F7A953-F385-4B68-B380-A7D896EFCBE6}"/>
+                <a16:creationId xmlns:a16="http://schemas.microsoft.com/office/drawing/2014/main" id="{57674ABD-7199-4555-8683-6213A0745CB3}"/>
               </a:ext>
             </a:extLst>
           </p:cNvPr>
@@ -7095,7 +7095,7 @@
           <p:cNvPr id="27" name="">
             <a:extLst xmlns:a="http://schemas.openxmlformats.org/drawingml/2006/main">
               <a:ext uri="{FF2B5EF4-FFF2-40B4-BE49-F238E27FC236}">
-                <a16:creationId xmlns:a16="http://schemas.microsoft.com/office/drawing/2014/main" id="{4BE0DA59-E723-4EEA-98A9-03FA0FE16ECF}"/>
+                <a16:creationId xmlns:a16="http://schemas.microsoft.com/office/drawing/2014/main" id="{FB3AA5D3-28CE-4DC1-A84B-277A3C16C8B9}"/>
               </a:ext>
             </a:extLst>
           </p:cNvPr>
@@ -7145,7 +7145,7 @@
           <p:cNvPr id="28" name="">
             <a:extLst xmlns:a="http://schemas.openxmlformats.org/drawingml/2006/main">
               <a:ext uri="{FF2B5EF4-FFF2-40B4-BE49-F238E27FC236}">
-                <a16:creationId xmlns:a16="http://schemas.microsoft.com/office/drawing/2014/main" id="{D2DC4C83-B2DB-40E9-92CF-0E974C2BAE84}"/>
+                <a16:creationId xmlns:a16="http://schemas.microsoft.com/office/drawing/2014/main" id="{9717A875-E6E4-4EF5-8D3D-1EAEB359E6C2}"/>
               </a:ext>
             </a:extLst>
           </p:cNvPr>
@@ -7227,7 +7227,7 @@
     </p:spTree>
     <p:extLst>
       <p:ext uri="{BB962C8B-B14F-4D97-AF65-F5344CB8AC3E}">
-        <p14:creationId xmlns:p14="http://schemas.microsoft.com/office/powerpoint/2010/main" val="1343912866"/>
+        <p14:creationId xmlns:p14="http://schemas.microsoft.com/office/powerpoint/2010/main" val="812728491"/>
       </p:ext>
     </p:extLst>
   </p:cSld>
@@ -7258,7 +7258,7 @@
           <p:cNvPr id="41" name="">
             <a:extLst xmlns:a="http://schemas.openxmlformats.org/drawingml/2006/main">
               <a:ext uri="{FF2B5EF4-FFF2-40B4-BE49-F238E27FC236}">
-                <a16:creationId xmlns:a16="http://schemas.microsoft.com/office/drawing/2014/main" id="{190502ED-707C-4272-9FFD-2E355472E304}"/>
+                <a16:creationId xmlns:a16="http://schemas.microsoft.com/office/drawing/2014/main" id="{1CE4ECE3-33F5-4A6D-8C0D-445A2EA4B93D}"/>
               </a:ext>
             </a:extLst>
           </p:cNvPr>
@@ -7289,7 +7289,7 @@
           <p:cNvPr id="2" name="">
             <a:extLst xmlns:a="http://schemas.openxmlformats.org/drawingml/2006/main">
               <a:ext uri="{FF2B5EF4-FFF2-40B4-BE49-F238E27FC236}">
-                <a16:creationId xmlns:a16="http://schemas.microsoft.com/office/drawing/2014/main" id="{1DBF3238-8A8C-4942-BD77-DDAAFE02EBC0}"/>
+                <a16:creationId xmlns:a16="http://schemas.microsoft.com/office/drawing/2014/main" id="{E77FABAD-D044-41E2-999B-85E112AEA72F}"/>
               </a:ext>
             </a:extLst>
           </p:cNvPr>
@@ -7339,7 +7339,7 @@
           <p:cNvPr id="3" name="">
             <a:extLst xmlns:a="http://schemas.openxmlformats.org/drawingml/2006/main">
               <a:ext uri="{FF2B5EF4-FFF2-40B4-BE49-F238E27FC236}">
-                <a16:creationId xmlns:a16="http://schemas.microsoft.com/office/drawing/2014/main" id="{8DA0B068-03B6-496D-9081-B7ECEFE61EA5}"/>
+                <a16:creationId xmlns:a16="http://schemas.microsoft.com/office/drawing/2014/main" id="{0F8A37EB-11BB-4CFF-A031-00B1C3AF907C}"/>
               </a:ext>
             </a:extLst>
           </p:cNvPr>
@@ -7389,7 +7389,7 @@
           <p:cNvPr id="4" name="">
             <a:extLst xmlns:a="http://schemas.openxmlformats.org/drawingml/2006/main">
               <a:ext uri="{FF2B5EF4-FFF2-40B4-BE49-F238E27FC236}">
-                <a16:creationId xmlns:a16="http://schemas.microsoft.com/office/drawing/2014/main" id="{9754FA35-854D-41F4-998C-B35888D5FCE3}"/>
+                <a16:creationId xmlns:a16="http://schemas.microsoft.com/office/drawing/2014/main" id="{55375020-A322-4418-9BE8-FDE692787EDB}"/>
               </a:ext>
             </a:extLst>
           </p:cNvPr>
@@ -7420,7 +7420,7 @@
           <p:cNvPr id="5" name="">
             <a:extLst xmlns:a="http://schemas.openxmlformats.org/drawingml/2006/main">
               <a:ext uri="{FF2B5EF4-FFF2-40B4-BE49-F238E27FC236}">
-                <a16:creationId xmlns:a16="http://schemas.microsoft.com/office/drawing/2014/main" id="{D18A37AE-B5D9-46B0-88F3-3E9022B9FC9E}"/>
+                <a16:creationId xmlns:a16="http://schemas.microsoft.com/office/drawing/2014/main" id="{AB261DA8-F3CB-4CA2-83CC-04C688F66A10}"/>
               </a:ext>
             </a:extLst>
           </p:cNvPr>
@@ -7470,7 +7470,7 @@
           <p:cNvPr id="6" name="">
             <a:extLst xmlns:a="http://schemas.openxmlformats.org/drawingml/2006/main">
               <a:ext uri="{FF2B5EF4-FFF2-40B4-BE49-F238E27FC236}">
-                <a16:creationId xmlns:a16="http://schemas.microsoft.com/office/drawing/2014/main" id="{C9BF3CFD-ECC2-4586-9286-D2063FEE1599}"/>
+                <a16:creationId xmlns:a16="http://schemas.microsoft.com/office/drawing/2014/main" id="{CC70AAC9-C9DF-419B-BD37-00DDF6AB7E3F}"/>
               </a:ext>
             </a:extLst>
           </p:cNvPr>
@@ -7520,7 +7520,7 @@
           <p:cNvPr id="7" name="">
             <a:extLst xmlns:a="http://schemas.openxmlformats.org/drawingml/2006/main">
               <a:ext uri="{FF2B5EF4-FFF2-40B4-BE49-F238E27FC236}">
-                <a16:creationId xmlns:a16="http://schemas.microsoft.com/office/drawing/2014/main" id="{40199D2A-27B9-470C-A025-2F8E4420A815}"/>
+                <a16:creationId xmlns:a16="http://schemas.microsoft.com/office/drawing/2014/main" id="{D991FE69-60D8-419E-BB83-70F61720D7CA}"/>
               </a:ext>
             </a:extLst>
           </p:cNvPr>
@@ -7553,7 +7553,7 @@
           <p:cNvPr id="8" name="">
             <a:extLst xmlns:a="http://schemas.openxmlformats.org/drawingml/2006/main">
               <a:ext uri="{FF2B5EF4-FFF2-40B4-BE49-F238E27FC236}">
-                <a16:creationId xmlns:a16="http://schemas.microsoft.com/office/drawing/2014/main" id="{EE72EE5B-EFEB-40DE-AB14-2590F930D4D8}"/>
+                <a16:creationId xmlns:a16="http://schemas.microsoft.com/office/drawing/2014/main" id="{8B9101A1-8CF0-4639-9A65-8A4514FEA9F5}"/>
               </a:ext>
             </a:extLst>
           </p:cNvPr>
@@ -7603,7 +7603,7 @@
           <p:cNvPr id="9" name="">
             <a:extLst xmlns:a="http://schemas.openxmlformats.org/drawingml/2006/main">
               <a:ext uri="{FF2B5EF4-FFF2-40B4-BE49-F238E27FC236}">
-                <a16:creationId xmlns:a16="http://schemas.microsoft.com/office/drawing/2014/main" id="{CF3ADF73-BB50-4B32-A40E-A9C7ABFE9687}"/>
+                <a16:creationId xmlns:a16="http://schemas.microsoft.com/office/drawing/2014/main" id="{84B6E1E8-8AB4-4A7C-81A1-B255817827DD}"/>
               </a:ext>
             </a:extLst>
           </p:cNvPr>
@@ -7638,7 +7638,7 @@
           <p:cNvPr id="10" name="">
             <a:extLst xmlns:a="http://schemas.openxmlformats.org/drawingml/2006/main">
               <a:ext uri="{FF2B5EF4-FFF2-40B4-BE49-F238E27FC236}">
-                <a16:creationId xmlns:a16="http://schemas.microsoft.com/office/drawing/2014/main" id="{DB256B32-EC1F-4ADE-87CF-AD8916DB79BF}"/>
+                <a16:creationId xmlns:a16="http://schemas.microsoft.com/office/drawing/2014/main" id="{A6B3F5E2-623B-4C74-AC1D-8389EDAE62C9}"/>
               </a:ext>
             </a:extLst>
           </p:cNvPr>
@@ -7671,7 +7671,7 @@
           <p:cNvPr id="11" name="">
             <a:extLst xmlns:a="http://schemas.openxmlformats.org/drawingml/2006/main">
               <a:ext uri="{FF2B5EF4-FFF2-40B4-BE49-F238E27FC236}">
-                <a16:creationId xmlns:a16="http://schemas.microsoft.com/office/drawing/2014/main" id="{02E3B66A-3AA4-472A-AB18-5ACB10F7F534}"/>
+                <a16:creationId xmlns:a16="http://schemas.microsoft.com/office/drawing/2014/main" id="{0A035538-3CD3-4894-9435-388E89B28F82}"/>
               </a:ext>
             </a:extLst>
           </p:cNvPr>
@@ -7721,7 +7721,7 @@
           <p:cNvPr id="12" name="">
             <a:extLst xmlns:a="http://schemas.openxmlformats.org/drawingml/2006/main">
               <a:ext uri="{FF2B5EF4-FFF2-40B4-BE49-F238E27FC236}">
-                <a16:creationId xmlns:a16="http://schemas.microsoft.com/office/drawing/2014/main" id="{D6F951E7-6014-4E88-83CE-61D0A0B3256F}"/>
+                <a16:creationId xmlns:a16="http://schemas.microsoft.com/office/drawing/2014/main" id="{868F7857-0C92-470B-B175-BE5DA420FF99}"/>
               </a:ext>
             </a:extLst>
           </p:cNvPr>
@@ -7771,7 +7771,7 @@
           <p:cNvPr id="13" name="">
             <a:extLst xmlns:a="http://schemas.openxmlformats.org/drawingml/2006/main">
               <a:ext uri="{FF2B5EF4-FFF2-40B4-BE49-F238E27FC236}">
-                <a16:creationId xmlns:a16="http://schemas.microsoft.com/office/drawing/2014/main" id="{059DA678-A6B2-4D42-A036-F4FECB496E64}"/>
+                <a16:creationId xmlns:a16="http://schemas.microsoft.com/office/drawing/2014/main" id="{2D657910-3EE7-4E66-B701-549834F9EF72}"/>
               </a:ext>
             </a:extLst>
           </p:cNvPr>
@@ -7806,7 +7806,7 @@
           <p:cNvPr id="14" name="">
             <a:extLst xmlns:a="http://schemas.openxmlformats.org/drawingml/2006/main">
               <a:ext uri="{FF2B5EF4-FFF2-40B4-BE49-F238E27FC236}">
-                <a16:creationId xmlns:a16="http://schemas.microsoft.com/office/drawing/2014/main" id="{C18FE5EB-0A43-4B21-A0DF-5A50D240C108}"/>
+                <a16:creationId xmlns:a16="http://schemas.microsoft.com/office/drawing/2014/main" id="{2BB03E69-C6C4-4AA1-A9C8-DBCFF92A0D33}"/>
               </a:ext>
             </a:extLst>
           </p:cNvPr>
@@ -7839,7 +7839,7 @@
           <p:cNvPr id="15" name="">
             <a:extLst xmlns:a="http://schemas.openxmlformats.org/drawingml/2006/main">
               <a:ext uri="{FF2B5EF4-FFF2-40B4-BE49-F238E27FC236}">
-                <a16:creationId xmlns:a16="http://schemas.microsoft.com/office/drawing/2014/main" id="{0DB1D7C5-7E2F-47F4-BC8D-4F38AD29D500}"/>
+                <a16:creationId xmlns:a16="http://schemas.microsoft.com/office/drawing/2014/main" id="{10C86A42-940D-47B6-B6C0-03C9E34CA063}"/>
               </a:ext>
             </a:extLst>
           </p:cNvPr>
@@ -7889,7 +7889,7 @@
           <p:cNvPr id="16" name="">
             <a:extLst xmlns:a="http://schemas.openxmlformats.org/drawingml/2006/main">
               <a:ext uri="{FF2B5EF4-FFF2-40B4-BE49-F238E27FC236}">
-                <a16:creationId xmlns:a16="http://schemas.microsoft.com/office/drawing/2014/main" id="{98E57A74-753D-4805-A1D2-01F63364A71E}"/>
+                <a16:creationId xmlns:a16="http://schemas.microsoft.com/office/drawing/2014/main" id="{2396A7E8-7343-4D8F-9ACE-6DF2341417D8}"/>
               </a:ext>
             </a:extLst>
           </p:cNvPr>
@@ -7939,7 +7939,7 @@
           <p:cNvPr id="17" name="">
             <a:extLst xmlns:a="http://schemas.openxmlformats.org/drawingml/2006/main">
               <a:ext uri="{FF2B5EF4-FFF2-40B4-BE49-F238E27FC236}">
-                <a16:creationId xmlns:a16="http://schemas.microsoft.com/office/drawing/2014/main" id="{B81A0FA1-A610-494A-95A8-A1E3168306F5}"/>
+                <a16:creationId xmlns:a16="http://schemas.microsoft.com/office/drawing/2014/main" id="{F2ADA6E4-0403-4BB9-8352-C323AE39288B}"/>
               </a:ext>
             </a:extLst>
           </p:cNvPr>
@@ -7974,7 +7974,7 @@
           <p:cNvPr id="18" name="">
             <a:extLst xmlns:a="http://schemas.openxmlformats.org/drawingml/2006/main">
               <a:ext uri="{FF2B5EF4-FFF2-40B4-BE49-F238E27FC236}">
-                <a16:creationId xmlns:a16="http://schemas.microsoft.com/office/drawing/2014/main" id="{B50593D9-91A0-4EAD-AAB7-A3B190032FE0}"/>
+                <a16:creationId xmlns:a16="http://schemas.microsoft.com/office/drawing/2014/main" id="{90A1FD3D-F7DD-4CFA-9077-B01273A1F172}"/>
               </a:ext>
             </a:extLst>
           </p:cNvPr>
@@ -8007,7 +8007,7 @@
           <p:cNvPr id="19" name="">
             <a:extLst xmlns:a="http://schemas.openxmlformats.org/drawingml/2006/main">
               <a:ext uri="{FF2B5EF4-FFF2-40B4-BE49-F238E27FC236}">
-                <a16:creationId xmlns:a16="http://schemas.microsoft.com/office/drawing/2014/main" id="{E8C23506-E5A2-4634-9F83-94E2CCA8CFB9}"/>
+                <a16:creationId xmlns:a16="http://schemas.microsoft.com/office/drawing/2014/main" id="{CC0AA307-07B4-45F4-9983-36CCFC63DC3A}"/>
               </a:ext>
             </a:extLst>
           </p:cNvPr>
@@ -8057,7 +8057,7 @@
           <p:cNvPr id="20" name="">
             <a:extLst xmlns:a="http://schemas.openxmlformats.org/drawingml/2006/main">
               <a:ext uri="{FF2B5EF4-FFF2-40B4-BE49-F238E27FC236}">
-                <a16:creationId xmlns:a16="http://schemas.microsoft.com/office/drawing/2014/main" id="{9D9B1518-71CD-464A-80E6-0AE504F1B9AD}"/>
+                <a16:creationId xmlns:a16="http://schemas.microsoft.com/office/drawing/2014/main" id="{974CD5DF-93F7-42F3-912B-45326092A287}"/>
               </a:ext>
             </a:extLst>
           </p:cNvPr>
@@ -8107,7 +8107,7 @@
           <p:cNvPr id="21" name="">
             <a:extLst xmlns:a="http://schemas.openxmlformats.org/drawingml/2006/main">
               <a:ext uri="{FF2B5EF4-FFF2-40B4-BE49-F238E27FC236}">
-                <a16:creationId xmlns:a16="http://schemas.microsoft.com/office/drawing/2014/main" id="{12A06CEB-DDBD-46AF-89E3-634F00F99658}"/>
+                <a16:creationId xmlns:a16="http://schemas.microsoft.com/office/drawing/2014/main" id="{FE6C7145-20ED-427A-8EF2-3DFF6B4FA626}"/>
               </a:ext>
             </a:extLst>
           </p:cNvPr>
@@ -8142,7 +8142,7 @@
           <p:cNvPr id="22" name="">
             <a:extLst xmlns:a="http://schemas.openxmlformats.org/drawingml/2006/main">
               <a:ext uri="{FF2B5EF4-FFF2-40B4-BE49-F238E27FC236}">
-                <a16:creationId xmlns:a16="http://schemas.microsoft.com/office/drawing/2014/main" id="{5E39CC45-9AC2-4B92-8E95-BE1F3A661F5A}"/>
+                <a16:creationId xmlns:a16="http://schemas.microsoft.com/office/drawing/2014/main" id="{5359D4C6-5302-4B11-9062-7BEA32473116}"/>
               </a:ext>
             </a:extLst>
           </p:cNvPr>
@@ -8175,7 +8175,7 @@
           <p:cNvPr id="23" name="">
             <a:extLst xmlns:a="http://schemas.openxmlformats.org/drawingml/2006/main">
               <a:ext uri="{FF2B5EF4-FFF2-40B4-BE49-F238E27FC236}">
-                <a16:creationId xmlns:a16="http://schemas.microsoft.com/office/drawing/2014/main" id="{64EF1737-BBB6-436D-A31D-56D85A8CE6FE}"/>
+                <a16:creationId xmlns:a16="http://schemas.microsoft.com/office/drawing/2014/main" id="{412973CF-6F5E-43DF-9110-59AE08DF99AC}"/>
               </a:ext>
             </a:extLst>
           </p:cNvPr>
@@ -8225,7 +8225,7 @@
           <p:cNvPr id="24" name="">
             <a:extLst xmlns:a="http://schemas.openxmlformats.org/drawingml/2006/main">
               <a:ext uri="{FF2B5EF4-FFF2-40B4-BE49-F238E27FC236}">
-                <a16:creationId xmlns:a16="http://schemas.microsoft.com/office/drawing/2014/main" id="{5AC9662D-851A-4A63-AF88-D0E23E106D2B}"/>
+                <a16:creationId xmlns:a16="http://schemas.microsoft.com/office/drawing/2014/main" id="{6654029C-249C-4BFC-A1B4-D8BC9A49CFE5}"/>
               </a:ext>
             </a:extLst>
           </p:cNvPr>
@@ -8353,7 +8353,7 @@
           <p:cNvPr id="28" name="">
             <a:extLst xmlns:a="http://schemas.openxmlformats.org/drawingml/2006/main">
               <a:ext uri="{FF2B5EF4-FFF2-40B4-BE49-F238E27FC236}">
-                <a16:creationId xmlns:a16="http://schemas.microsoft.com/office/drawing/2014/main" id="{8A1A4709-719B-47A0-8124-9D2474B61A5F}"/>
+                <a16:creationId xmlns:a16="http://schemas.microsoft.com/office/drawing/2014/main" id="{FD5469AC-D21A-4C77-8E3F-E0097987BE6B}"/>
               </a:ext>
             </a:extLst>
           </p:cNvPr>
@@ -8388,7 +8388,7 @@
           <p:cNvPr id="29" name="">
             <a:extLst xmlns:a="http://schemas.openxmlformats.org/drawingml/2006/main">
               <a:ext uri="{FF2B5EF4-FFF2-40B4-BE49-F238E27FC236}">
-                <a16:creationId xmlns:a16="http://schemas.microsoft.com/office/drawing/2014/main" id="{1DBAE0A6-1E29-4759-9A59-2C67BB3ED624}"/>
+                <a16:creationId xmlns:a16="http://schemas.microsoft.com/office/drawing/2014/main" id="{ADFD486C-D18B-4B2F-A20B-3416E21A45B9}"/>
               </a:ext>
             </a:extLst>
           </p:cNvPr>
@@ -8421,7 +8421,7 @@
           <p:cNvPr id="30" name="">
             <a:extLst xmlns:a="http://schemas.openxmlformats.org/drawingml/2006/main">
               <a:ext uri="{FF2B5EF4-FFF2-40B4-BE49-F238E27FC236}">
-                <a16:creationId xmlns:a16="http://schemas.microsoft.com/office/drawing/2014/main" id="{E58592D1-A69E-4C0D-BD98-331FDECAD2F9}"/>
+                <a16:creationId xmlns:a16="http://schemas.microsoft.com/office/drawing/2014/main" id="{735E23FA-90A6-4F23-90AE-F6E7A6EBEDF6}"/>
               </a:ext>
             </a:extLst>
           </p:cNvPr>
@@ -8471,7 +8471,7 @@
           <p:cNvPr id="31" name="">
             <a:extLst xmlns:a="http://schemas.openxmlformats.org/drawingml/2006/main">
               <a:ext uri="{FF2B5EF4-FFF2-40B4-BE49-F238E27FC236}">
-                <a16:creationId xmlns:a16="http://schemas.microsoft.com/office/drawing/2014/main" id="{E2119107-B166-4236-BB16-C7A5272E8C45}"/>
+                <a16:creationId xmlns:a16="http://schemas.microsoft.com/office/drawing/2014/main" id="{AB9247B1-844B-4DAB-B1E5-5DABFE83EED6}"/>
               </a:ext>
             </a:extLst>
           </p:cNvPr>
@@ -8547,7 +8547,7 @@
           <p:cNvPr id="33" name="">
             <a:extLst xmlns:a="http://schemas.openxmlformats.org/drawingml/2006/main">
               <a:ext uri="{FF2B5EF4-FFF2-40B4-BE49-F238E27FC236}">
-                <a16:creationId xmlns:a16="http://schemas.microsoft.com/office/drawing/2014/main" id="{AD010AAB-115B-4F51-A320-1819B4E83814}"/>
+                <a16:creationId xmlns:a16="http://schemas.microsoft.com/office/drawing/2014/main" id="{FD619BB8-A885-41D5-AA1B-F71E1EE208EA}"/>
               </a:ext>
             </a:extLst>
           </p:cNvPr>
@@ -8582,7 +8582,7 @@
           <p:cNvPr id="34" name="">
             <a:extLst xmlns:a="http://schemas.openxmlformats.org/drawingml/2006/main">
               <a:ext uri="{FF2B5EF4-FFF2-40B4-BE49-F238E27FC236}">
-                <a16:creationId xmlns:a16="http://schemas.microsoft.com/office/drawing/2014/main" id="{E45C6953-089A-44EA-A54C-71778E8EC7BF}"/>
+                <a16:creationId xmlns:a16="http://schemas.microsoft.com/office/drawing/2014/main" id="{F7EF539A-9DFB-4FAA-8EA9-B0BFE373C95D}"/>
               </a:ext>
             </a:extLst>
           </p:cNvPr>
@@ -8615,7 +8615,7 @@
           <p:cNvPr id="35" name="">
             <a:extLst xmlns:a="http://schemas.openxmlformats.org/drawingml/2006/main">
               <a:ext uri="{FF2B5EF4-FFF2-40B4-BE49-F238E27FC236}">
-                <a16:creationId xmlns:a16="http://schemas.microsoft.com/office/drawing/2014/main" id="{06FB8FFE-651D-438E-B225-430D6629FDE1}"/>
+                <a16:creationId xmlns:a16="http://schemas.microsoft.com/office/drawing/2014/main" id="{67D9D3E9-9373-4BA9-AFC3-8EC38B275216}"/>
               </a:ext>
             </a:extLst>
           </p:cNvPr>
@@ -8665,7 +8665,7 @@
           <p:cNvPr id="36" name="">
             <a:extLst xmlns:a="http://schemas.openxmlformats.org/drawingml/2006/main">
               <a:ext uri="{FF2B5EF4-FFF2-40B4-BE49-F238E27FC236}">
-                <a16:creationId xmlns:a16="http://schemas.microsoft.com/office/drawing/2014/main" id="{8D428B46-B9B7-4F19-9E34-CBB274375771}"/>
+                <a16:creationId xmlns:a16="http://schemas.microsoft.com/office/drawing/2014/main" id="{F5B2CEA6-67DD-42CA-AEF5-B4DE8B6E20A1}"/>
               </a:ext>
             </a:extLst>
           </p:cNvPr>
@@ -8770,7 +8770,7 @@
           <p:cNvPr id="39" name="">
             <a:extLst xmlns:a="http://schemas.openxmlformats.org/drawingml/2006/main">
               <a:ext uri="{FF2B5EF4-FFF2-40B4-BE49-F238E27FC236}">
-                <a16:creationId xmlns:a16="http://schemas.microsoft.com/office/drawing/2014/main" id="{A2773811-85B5-4CBF-8B52-D87BD2C09B3C}"/>
+                <a16:creationId xmlns:a16="http://schemas.microsoft.com/office/drawing/2014/main" id="{21D08368-E5F0-48D3-8DC5-81F5B568BE99}"/>
               </a:ext>
             </a:extLst>
           </p:cNvPr>
@@ -8820,7 +8820,7 @@
           <p:cNvPr id="40" name="">
             <a:extLst xmlns:a="http://schemas.openxmlformats.org/drawingml/2006/main">
               <a:ext uri="{FF2B5EF4-FFF2-40B4-BE49-F238E27FC236}">
-                <a16:creationId xmlns:a16="http://schemas.microsoft.com/office/drawing/2014/main" id="{6B503607-7FB1-4AB7-ADA9-39520DE31DE1}"/>
+                <a16:creationId xmlns:a16="http://schemas.microsoft.com/office/drawing/2014/main" id="{4F68B837-F761-410D-B15B-03D521B14ACA}"/>
               </a:ext>
             </a:extLst>
           </p:cNvPr>
@@ -8868,7 +8868,7 @@
     </p:spTree>
     <p:extLst>
       <p:ext uri="{BB962C8B-B14F-4D97-AF65-F5344CB8AC3E}">
-        <p14:creationId xmlns:p14="http://schemas.microsoft.com/office/powerpoint/2010/main" val="1447683425"/>
+        <p14:creationId xmlns:p14="http://schemas.microsoft.com/office/powerpoint/2010/main" val="281768370"/>
       </p:ext>
     </p:extLst>
   </p:cSld>
@@ -8899,7 +8899,7 @@
           <p:cNvPr id="19" name="">
             <a:extLst xmlns:a="http://schemas.openxmlformats.org/drawingml/2006/main">
               <a:ext uri="{FF2B5EF4-FFF2-40B4-BE49-F238E27FC236}">
-                <a16:creationId xmlns:a16="http://schemas.microsoft.com/office/drawing/2014/main" id="{9530EF2B-B882-4726-9371-E16252F33AE3}"/>
+                <a16:creationId xmlns:a16="http://schemas.microsoft.com/office/drawing/2014/main" id="{868D296D-E9FC-4B91-8E0A-4F575578F338}"/>
               </a:ext>
             </a:extLst>
           </p:cNvPr>
@@ -8930,7 +8930,7 @@
           <p:cNvPr id="2" name="">
             <a:extLst xmlns:a="http://schemas.openxmlformats.org/drawingml/2006/main">
               <a:ext uri="{FF2B5EF4-FFF2-40B4-BE49-F238E27FC236}">
-                <a16:creationId xmlns:a16="http://schemas.microsoft.com/office/drawing/2014/main" id="{D455AD2D-298C-482C-9542-D5AA121384C2}"/>
+                <a16:creationId xmlns:a16="http://schemas.microsoft.com/office/drawing/2014/main" id="{E6B4B373-392C-40FC-B886-C239EDE75DEE}"/>
               </a:ext>
             </a:extLst>
           </p:cNvPr>
@@ -8980,7 +8980,7 @@
           <p:cNvPr id="3" name="">
             <a:extLst xmlns:a="http://schemas.openxmlformats.org/drawingml/2006/main">
               <a:ext uri="{FF2B5EF4-FFF2-40B4-BE49-F238E27FC236}">
-                <a16:creationId xmlns:a16="http://schemas.microsoft.com/office/drawing/2014/main" id="{FE7A5AFE-EAC4-4B24-9385-C5A5F8123388}"/>
+                <a16:creationId xmlns:a16="http://schemas.microsoft.com/office/drawing/2014/main" id="{1008D0D4-B10B-4F42-98AC-4791A7C01A95}"/>
               </a:ext>
             </a:extLst>
           </p:cNvPr>
@@ -9030,7 +9030,7 @@
           <p:cNvPr id="4" name="">
             <a:extLst xmlns:a="http://schemas.openxmlformats.org/drawingml/2006/main">
               <a:ext uri="{FF2B5EF4-FFF2-40B4-BE49-F238E27FC236}">
-                <a16:creationId xmlns:a16="http://schemas.microsoft.com/office/drawing/2014/main" id="{473389CF-9D23-44E8-80E4-55A39B713738}"/>
+                <a16:creationId xmlns:a16="http://schemas.microsoft.com/office/drawing/2014/main" id="{52F6AF21-7FD9-4332-B1AE-07BC7E0A7E8E}"/>
               </a:ext>
             </a:extLst>
           </p:cNvPr>
@@ -9061,7 +9061,7 @@
           <p:cNvPr id="5" name="">
             <a:extLst xmlns:a="http://schemas.openxmlformats.org/drawingml/2006/main">
               <a:ext uri="{FF2B5EF4-FFF2-40B4-BE49-F238E27FC236}">
-                <a16:creationId xmlns:a16="http://schemas.microsoft.com/office/drawing/2014/main" id="{E1BD8D8E-49B5-4EC4-9B66-7B2F09EB9236}"/>
+                <a16:creationId xmlns:a16="http://schemas.microsoft.com/office/drawing/2014/main" id="{59E3FA66-D7A4-4A60-9BA8-8F1661375CC2}"/>
               </a:ext>
             </a:extLst>
           </p:cNvPr>
@@ -9111,7 +9111,7 @@
           <p:cNvPr id="6" name="">
             <a:extLst xmlns:a="http://schemas.openxmlformats.org/drawingml/2006/main">
               <a:ext uri="{FF2B5EF4-FFF2-40B4-BE49-F238E27FC236}">
-                <a16:creationId xmlns:a16="http://schemas.microsoft.com/office/drawing/2014/main" id="{10ECFD77-D562-4283-B959-AA059A423900}"/>
+                <a16:creationId xmlns:a16="http://schemas.microsoft.com/office/drawing/2014/main" id="{5ABCA6D5-5413-4638-A701-3C2D0B1067F5}"/>
               </a:ext>
             </a:extLst>
           </p:cNvPr>
@@ -9161,7 +9161,7 @@
           <p:cNvPr id="7" name="">
             <a:extLst xmlns:a="http://schemas.openxmlformats.org/drawingml/2006/main">
               <a:ext uri="{FF2B5EF4-FFF2-40B4-BE49-F238E27FC236}">
-                <a16:creationId xmlns:a16="http://schemas.microsoft.com/office/drawing/2014/main" id="{DFB6CF33-02F1-40DB-9300-3AE85E854007}"/>
+                <a16:creationId xmlns:a16="http://schemas.microsoft.com/office/drawing/2014/main" id="{258ABE11-4F0F-42DE-82D0-0B2C24E3F3E6}"/>
               </a:ext>
             </a:extLst>
           </p:cNvPr>
@@ -9194,7 +9194,7 @@
           <p:cNvPr id="8" name="">
             <a:extLst xmlns:a="http://schemas.openxmlformats.org/drawingml/2006/main">
               <a:ext uri="{FF2B5EF4-FFF2-40B4-BE49-F238E27FC236}">
-                <a16:creationId xmlns:a16="http://schemas.microsoft.com/office/drawing/2014/main" id="{6EBBEFED-A2F6-40F4-A1BA-22E03A13E17D}"/>
+                <a16:creationId xmlns:a16="http://schemas.microsoft.com/office/drawing/2014/main" id="{501EAB7A-886A-42C9-B3A2-3CFA6352B1CF}"/>
               </a:ext>
             </a:extLst>
           </p:cNvPr>
@@ -9244,7 +9244,7 @@
           <p:cNvPr id="9" name="">
             <a:extLst xmlns:a="http://schemas.openxmlformats.org/drawingml/2006/main">
               <a:ext uri="{FF2B5EF4-FFF2-40B4-BE49-F238E27FC236}">
-                <a16:creationId xmlns:a16="http://schemas.microsoft.com/office/drawing/2014/main" id="{EBFDCE40-70BA-4D1B-8E8C-E05747C6ECBC}"/>
+                <a16:creationId xmlns:a16="http://schemas.microsoft.com/office/drawing/2014/main" id="{83A06043-5ADE-4429-86B0-EFAEA378D07F}"/>
               </a:ext>
             </a:extLst>
           </p:cNvPr>
@@ -9294,7 +9294,7 @@
           <p:cNvPr id="10" name="">
             <a:extLst xmlns:a="http://schemas.openxmlformats.org/drawingml/2006/main">
               <a:ext uri="{FF2B5EF4-FFF2-40B4-BE49-F238E27FC236}">
-                <a16:creationId xmlns:a16="http://schemas.microsoft.com/office/drawing/2014/main" id="{1E8CE11C-1B64-409C-ACFB-B4C4818B42D2}"/>
+                <a16:creationId xmlns:a16="http://schemas.microsoft.com/office/drawing/2014/main" id="{503B7271-A7D0-4821-B798-A37C67CCA9C4}"/>
               </a:ext>
             </a:extLst>
           </p:cNvPr>
@@ -9344,7 +9344,7 @@
           <p:cNvPr id="11" name="">
             <a:extLst xmlns:a="http://schemas.openxmlformats.org/drawingml/2006/main">
               <a:ext uri="{FF2B5EF4-FFF2-40B4-BE49-F238E27FC236}">
-                <a16:creationId xmlns:a16="http://schemas.microsoft.com/office/drawing/2014/main" id="{4EDC85B8-BA73-40CC-9BF6-9C6A34F6CB27}"/>
+                <a16:creationId xmlns:a16="http://schemas.microsoft.com/office/drawing/2014/main" id="{5C1249A3-02E4-4B4A-A13E-43D2027D2C03}"/>
               </a:ext>
             </a:extLst>
           </p:cNvPr>
@@ -9394,7 +9394,7 @@
           <p:cNvPr id="12" name="">
             <a:extLst xmlns:a="http://schemas.openxmlformats.org/drawingml/2006/main">
               <a:ext uri="{FF2B5EF4-FFF2-40B4-BE49-F238E27FC236}">
-                <a16:creationId xmlns:a16="http://schemas.microsoft.com/office/drawing/2014/main" id="{D801C4AE-6B25-4D66-B31E-49C014E5B636}"/>
+                <a16:creationId xmlns:a16="http://schemas.microsoft.com/office/drawing/2014/main" id="{140BF545-32A4-4BBF-9000-8A055CC3BB0F}"/>
               </a:ext>
             </a:extLst>
           </p:cNvPr>
@@ -9444,7 +9444,7 @@
           <p:cNvPr id="13" name="">
             <a:extLst xmlns:a="http://schemas.openxmlformats.org/drawingml/2006/main">
               <a:ext uri="{FF2B5EF4-FFF2-40B4-BE49-F238E27FC236}">
-                <a16:creationId xmlns:a16="http://schemas.microsoft.com/office/drawing/2014/main" id="{A0401B48-9214-4158-9B93-520DAB2DD1B1}"/>
+                <a16:creationId xmlns:a16="http://schemas.microsoft.com/office/drawing/2014/main" id="{84408736-F262-49FD-880F-8821CE73600E}"/>
               </a:ext>
             </a:extLst>
           </p:cNvPr>
@@ -9494,7 +9494,7 @@
           <p:cNvPr id="14" name="">
             <a:extLst xmlns:a="http://schemas.openxmlformats.org/drawingml/2006/main">
               <a:ext uri="{FF2B5EF4-FFF2-40B4-BE49-F238E27FC236}">
-                <a16:creationId xmlns:a16="http://schemas.microsoft.com/office/drawing/2014/main" id="{40369437-01FB-438E-AC29-0950E030574C}"/>
+                <a16:creationId xmlns:a16="http://schemas.microsoft.com/office/drawing/2014/main" id="{A74EC1DB-2D4A-461E-8595-B55889BBE091}"/>
               </a:ext>
             </a:extLst>
           </p:cNvPr>
@@ -9544,7 +9544,7 @@
           <p:cNvPr id="15" name="">
             <a:extLst xmlns:a="http://schemas.openxmlformats.org/drawingml/2006/main">
               <a:ext uri="{FF2B5EF4-FFF2-40B4-BE49-F238E27FC236}">
-                <a16:creationId xmlns:a16="http://schemas.microsoft.com/office/drawing/2014/main" id="{D5A98BBF-B0F0-4744-A9C4-626D10F8B586}"/>
+                <a16:creationId xmlns:a16="http://schemas.microsoft.com/office/drawing/2014/main" id="{A5108A81-A466-4D02-B0CC-CA2CBE408DC0}"/>
               </a:ext>
             </a:extLst>
           </p:cNvPr>
@@ -9594,7 +9594,7 @@
           <p:cNvPr id="16" name="">
             <a:extLst xmlns:a="http://schemas.openxmlformats.org/drawingml/2006/main">
               <a:ext uri="{FF2B5EF4-FFF2-40B4-BE49-F238E27FC236}">
-                <a16:creationId xmlns:a16="http://schemas.microsoft.com/office/drawing/2014/main" id="{54A5BF82-2A0F-4426-BB7C-A33BD4A13677}"/>
+                <a16:creationId xmlns:a16="http://schemas.microsoft.com/office/drawing/2014/main" id="{73C85667-30FB-4F16-9EA5-1521D7BFC2BF}"/>
               </a:ext>
             </a:extLst>
           </p:cNvPr>
@@ -9644,7 +9644,7 @@
           <p:cNvPr id="17" name="">
             <a:extLst xmlns:a="http://schemas.openxmlformats.org/drawingml/2006/main">
               <a:ext uri="{FF2B5EF4-FFF2-40B4-BE49-F238E27FC236}">
-                <a16:creationId xmlns:a16="http://schemas.microsoft.com/office/drawing/2014/main" id="{D732446F-65C4-427D-8ED3-C89C93EB8FBD}"/>
+                <a16:creationId xmlns:a16="http://schemas.microsoft.com/office/drawing/2014/main" id="{F7D2F6EF-A7A0-4D72-8939-78222A2A2828}"/>
               </a:ext>
             </a:extLst>
           </p:cNvPr>
@@ -9679,7 +9679,7 @@
           <p:cNvPr id="18" name="">
             <a:extLst xmlns:a="http://schemas.openxmlformats.org/drawingml/2006/main">
               <a:ext uri="{FF2B5EF4-FFF2-40B4-BE49-F238E27FC236}">
-                <a16:creationId xmlns:a16="http://schemas.microsoft.com/office/drawing/2014/main" id="{3B5946CA-C130-4C48-BD48-A68EB9F5E8F0}"/>
+                <a16:creationId xmlns:a16="http://schemas.microsoft.com/office/drawing/2014/main" id="{FCC39708-0A30-4986-9744-602BD554DEF0}"/>
               </a:ext>
             </a:extLst>
           </p:cNvPr>
@@ -9727,7 +9727,7 @@
     </p:spTree>
     <p:extLst>
       <p:ext uri="{BB962C8B-B14F-4D97-AF65-F5344CB8AC3E}">
-        <p14:creationId xmlns:p14="http://schemas.microsoft.com/office/powerpoint/2010/main" val="874962276"/>
+        <p14:creationId xmlns:p14="http://schemas.microsoft.com/office/powerpoint/2010/main" val="1145416393"/>
       </p:ext>
     </p:extLst>
   </p:cSld>
@@ -9758,7 +9758,7 @@
           <p:cNvPr id="22" name="">
             <a:extLst xmlns:a="http://schemas.openxmlformats.org/drawingml/2006/main">
               <a:ext uri="{FF2B5EF4-FFF2-40B4-BE49-F238E27FC236}">
-                <a16:creationId xmlns:a16="http://schemas.microsoft.com/office/drawing/2014/main" id="{65F84724-DB71-4DAC-B568-AD0CCB89CC83}"/>
+                <a16:creationId xmlns:a16="http://schemas.microsoft.com/office/drawing/2014/main" id="{01E0223E-9A03-4E81-947C-33235C748D7B}"/>
               </a:ext>
             </a:extLst>
           </p:cNvPr>
@@ -9789,7 +9789,7 @@
           <p:cNvPr id="2" name="">
             <a:extLst xmlns:a="http://schemas.openxmlformats.org/drawingml/2006/main">
               <a:ext uri="{FF2B5EF4-FFF2-40B4-BE49-F238E27FC236}">
-                <a16:creationId xmlns:a16="http://schemas.microsoft.com/office/drawing/2014/main" id="{D4643A8D-6AB2-48EC-BABF-80E462927DD2}"/>
+                <a16:creationId xmlns:a16="http://schemas.microsoft.com/office/drawing/2014/main" id="{8E4A38D0-4A32-4FF6-BDCC-F365B0A082FF}"/>
               </a:ext>
             </a:extLst>
           </p:cNvPr>
@@ -9839,7 +9839,7 @@
           <p:cNvPr id="3" name="">
             <a:extLst xmlns:a="http://schemas.openxmlformats.org/drawingml/2006/main">
               <a:ext uri="{FF2B5EF4-FFF2-40B4-BE49-F238E27FC236}">
-                <a16:creationId xmlns:a16="http://schemas.microsoft.com/office/drawing/2014/main" id="{4534D092-922A-4829-B380-91AF9A90D785}"/>
+                <a16:creationId xmlns:a16="http://schemas.microsoft.com/office/drawing/2014/main" id="{6DD07F5D-9477-450C-A7C5-5E38CAECAB27}"/>
               </a:ext>
             </a:extLst>
           </p:cNvPr>
@@ -9889,7 +9889,7 @@
           <p:cNvPr id="4" name="">
             <a:extLst xmlns:a="http://schemas.openxmlformats.org/drawingml/2006/main">
               <a:ext uri="{FF2B5EF4-FFF2-40B4-BE49-F238E27FC236}">
-                <a16:creationId xmlns:a16="http://schemas.microsoft.com/office/drawing/2014/main" id="{CABBCC91-DCEB-40AA-B438-8E06F3ADF84E}"/>
+                <a16:creationId xmlns:a16="http://schemas.microsoft.com/office/drawing/2014/main" id="{DEA50283-96BC-48E7-B1FF-ED5DAF2B1EF8}"/>
               </a:ext>
             </a:extLst>
           </p:cNvPr>
@@ -9920,7 +9920,7 @@
           <p:cNvPr id="5" name="">
             <a:extLst xmlns:a="http://schemas.openxmlformats.org/drawingml/2006/main">
               <a:ext uri="{FF2B5EF4-FFF2-40B4-BE49-F238E27FC236}">
-                <a16:creationId xmlns:a16="http://schemas.microsoft.com/office/drawing/2014/main" id="{F186B806-F25C-45C6-A154-E9A596D0DE8F}"/>
+                <a16:creationId xmlns:a16="http://schemas.microsoft.com/office/drawing/2014/main" id="{513F12BC-D6AD-4555-AEFF-92CA2C72C15A}"/>
               </a:ext>
             </a:extLst>
           </p:cNvPr>
@@ -9970,7 +9970,7 @@
           <p:cNvPr id="6" name="">
             <a:extLst xmlns:a="http://schemas.openxmlformats.org/drawingml/2006/main">
               <a:ext uri="{FF2B5EF4-FFF2-40B4-BE49-F238E27FC236}">
-                <a16:creationId xmlns:a16="http://schemas.microsoft.com/office/drawing/2014/main" id="{152F5C91-22AF-44CF-9631-B9EA2E237285}"/>
+                <a16:creationId xmlns:a16="http://schemas.microsoft.com/office/drawing/2014/main" id="{18CBA795-2480-48EE-B92D-51B851D48B00}"/>
               </a:ext>
             </a:extLst>
           </p:cNvPr>
@@ -10010,7 +10010,7 @@
                   <a:srgbClr val="F7F8FA"/>
                 </a:solidFill>
               </a:rPr>
-              <a:t>Sponsor a focused pilot.</a:t>
+              <a:t>My recommendation: authorize a focused pilot.</a:t>
             </a:r>
           </a:p>
         </p:txBody>
@@ -10020,7 +10020,7 @@
           <p:cNvPr id="7" name="">
             <a:extLst xmlns:a="http://schemas.openxmlformats.org/drawingml/2006/main">
               <a:ext uri="{FF2B5EF4-FFF2-40B4-BE49-F238E27FC236}">
-                <a16:creationId xmlns:a16="http://schemas.microsoft.com/office/drawing/2014/main" id="{741B3F21-B43D-4C7D-AB64-7F07D8D1CDC2}"/>
+                <a16:creationId xmlns:a16="http://schemas.microsoft.com/office/drawing/2014/main" id="{5DBBAFA6-7BB3-43DC-80F3-1B5C64399A98}"/>
               </a:ext>
             </a:extLst>
           </p:cNvPr>
@@ -10053,7 +10053,7 @@
           <p:cNvPr id="8" name="">
             <a:extLst xmlns:a="http://schemas.openxmlformats.org/drawingml/2006/main">
               <a:ext uri="{FF2B5EF4-FFF2-40B4-BE49-F238E27FC236}">
-                <a16:creationId xmlns:a16="http://schemas.microsoft.com/office/drawing/2014/main" id="{761DEE5A-58B5-405A-96EB-7F8F194D506C}"/>
+                <a16:creationId xmlns:a16="http://schemas.microsoft.com/office/drawing/2014/main" id="{E64C72AB-DDB7-4AA8-9D34-E1741CA0DD6E}"/>
               </a:ext>
             </a:extLst>
           </p:cNvPr>
@@ -10093,7 +10093,7 @@
                   <a:srgbClr val="AAB3C0"/>
                 </a:solidFill>
               </a:rPr>
-              <a:t>Use evidence from one non-production integration before expanding scope.</a:t>
+              <a:t>I will test one non-production integration and return with evidence before proposing broader adoption.</a:t>
             </a:r>
           </a:p>
         </p:txBody>
@@ -10103,7 +10103,7 @@
           <p:cNvPr id="9" name="">
             <a:extLst xmlns:a="http://schemas.openxmlformats.org/drawingml/2006/main">
               <a:ext uri="{FF2B5EF4-FFF2-40B4-BE49-F238E27FC236}">
-                <a16:creationId xmlns:a16="http://schemas.microsoft.com/office/drawing/2014/main" id="{392D9B0B-907D-4562-8876-952BFC1ED440}"/>
+                <a16:creationId xmlns:a16="http://schemas.microsoft.com/office/drawing/2014/main" id="{7A09BF1E-C948-44C2-B45C-4AD0A1F2BEA9}"/>
               </a:ext>
             </a:extLst>
           </p:cNvPr>
@@ -10138,7 +10138,7 @@
           <p:cNvPr id="10" name="">
             <a:extLst xmlns:a="http://schemas.openxmlformats.org/drawingml/2006/main">
               <a:ext uri="{FF2B5EF4-FFF2-40B4-BE49-F238E27FC236}">
-                <a16:creationId xmlns:a16="http://schemas.microsoft.com/office/drawing/2014/main" id="{CBAB6FFE-A5DE-42E3-A131-E91EB236D300}"/>
+                <a16:creationId xmlns:a16="http://schemas.microsoft.com/office/drawing/2014/main" id="{F49ACA50-14B9-465B-AD9E-F04A59CBE1E4}"/>
               </a:ext>
             </a:extLst>
           </p:cNvPr>
@@ -10188,7 +10188,7 @@
           <p:cNvPr id="11" name="">
             <a:extLst xmlns:a="http://schemas.openxmlformats.org/drawingml/2006/main">
               <a:ext uri="{FF2B5EF4-FFF2-40B4-BE49-F238E27FC236}">
-                <a16:creationId xmlns:a16="http://schemas.microsoft.com/office/drawing/2014/main" id="{47BF051F-BE8A-4E25-9046-48FCBC76C0B2}"/>
+                <a16:creationId xmlns:a16="http://schemas.microsoft.com/office/drawing/2014/main" id="{B194FC64-BED7-4C4F-8682-F5685F333BFF}"/>
               </a:ext>
             </a:extLst>
           </p:cNvPr>
@@ -10228,7 +10228,7 @@
                   <a:srgbClr val="F7F8FA"/>
                 </a:solidFill>
               </a:rPr>
-              <a:t>Choose one request path</a:t>
+              <a:t>Align the decision owners</a:t>
             </a:r>
           </a:p>
         </p:txBody>
@@ -10238,7 +10238,7 @@
           <p:cNvPr id="12" name="">
             <a:extLst xmlns:a="http://schemas.openxmlformats.org/drawingml/2006/main">
               <a:ext uri="{FF2B5EF4-FFF2-40B4-BE49-F238E27FC236}">
-                <a16:creationId xmlns:a16="http://schemas.microsoft.com/office/drawing/2014/main" id="{533D29AD-AABB-4C34-85DF-2843071F28C1}"/>
+                <a16:creationId xmlns:a16="http://schemas.microsoft.com/office/drawing/2014/main" id="{2F7ECE7F-DDF5-4351-8B91-825EB9DF0435}"/>
               </a:ext>
             </a:extLst>
           </p:cNvPr>
@@ -10278,7 +10278,7 @@
                   <a:srgbClr val="AAB3C0"/>
                 </a:solidFill>
               </a:rPr>
-              <a:t>Agree on the approved-event payload and owner.</a:t>
+              <a:t>I will confirm the approved-event payload, data ownership, safe blocked state, and success measures.</a:t>
             </a:r>
           </a:p>
         </p:txBody>
@@ -10288,7 +10288,7 @@
           <p:cNvPr id="13" name="">
             <a:extLst xmlns:a="http://schemas.openxmlformats.org/drawingml/2006/main">
               <a:ext uri="{FF2B5EF4-FFF2-40B4-BE49-F238E27FC236}">
-                <a16:creationId xmlns:a16="http://schemas.microsoft.com/office/drawing/2014/main" id="{D11C6B38-1373-4EF3-9EDD-D5AF19730B86}"/>
+                <a16:creationId xmlns:a16="http://schemas.microsoft.com/office/drawing/2014/main" id="{20646720-B511-403E-8247-5225AD43A774}"/>
               </a:ext>
             </a:extLst>
           </p:cNvPr>
@@ -10323,7 +10323,7 @@
           <p:cNvPr id="14" name="">
             <a:extLst xmlns:a="http://schemas.openxmlformats.org/drawingml/2006/main">
               <a:ext uri="{FF2B5EF4-FFF2-40B4-BE49-F238E27FC236}">
-                <a16:creationId xmlns:a16="http://schemas.microsoft.com/office/drawing/2014/main" id="{6744EF15-B881-43F2-8E38-87B52CB6E9C2}"/>
+                <a16:creationId xmlns:a16="http://schemas.microsoft.com/office/drawing/2014/main" id="{AC570AA1-1581-4C21-9112-835856B10D93}"/>
               </a:ext>
             </a:extLst>
           </p:cNvPr>
@@ -10373,7 +10373,7 @@
           <p:cNvPr id="15" name="">
             <a:extLst xmlns:a="http://schemas.openxmlformats.org/drawingml/2006/main">
               <a:ext uri="{FF2B5EF4-FFF2-40B4-BE49-F238E27FC236}">
-                <a16:creationId xmlns:a16="http://schemas.microsoft.com/office/drawing/2014/main" id="{C6FDBDBD-5E82-49D2-841F-6FD22C8BB654}"/>
+                <a16:creationId xmlns:a16="http://schemas.microsoft.com/office/drawing/2014/main" id="{BBCB5BA3-09DC-4502-8426-B9288A8CA087}"/>
               </a:ext>
             </a:extLst>
           </p:cNvPr>
@@ -10413,7 +10413,7 @@
                   <a:srgbClr val="F7F8FA"/>
                 </a:solidFill>
               </a:rPr>
-              <a:t>Connect one adapter</a:t>
+              <a:t>Prove one integration</a:t>
             </a:r>
           </a:p>
         </p:txBody>
@@ -10423,7 +10423,7 @@
           <p:cNvPr id="16" name="">
             <a:extLst xmlns:a="http://schemas.openxmlformats.org/drawingml/2006/main">
               <a:ext uri="{FF2B5EF4-FFF2-40B4-BE49-F238E27FC236}">
-                <a16:creationId xmlns:a16="http://schemas.microsoft.com/office/drawing/2014/main" id="{2CE05370-9D5C-465B-99D5-EDC854F7F5B4}"/>
+                <a16:creationId xmlns:a16="http://schemas.microsoft.com/office/drawing/2014/main" id="{92DE44B8-7EDA-4A61-B9D8-839D5BC8A51B}"/>
               </a:ext>
             </a:extLst>
           </p:cNvPr>
@@ -10463,7 +10463,7 @@
                   <a:srgbClr val="AAB3C0"/>
                 </a:solidFill>
               </a:rPr>
-              <a:t>Prefer the on-prem S3-compatible artifact service or non-production VMware.</a:t>
+              <a:t>I recommend S3-compatible artifact storage first; non-production VMware is the alternate.</a:t>
             </a:r>
           </a:p>
         </p:txBody>
@@ -10473,7 +10473,7 @@
           <p:cNvPr id="17" name="">
             <a:extLst xmlns:a="http://schemas.openxmlformats.org/drawingml/2006/main">
               <a:ext uri="{FF2B5EF4-FFF2-40B4-BE49-F238E27FC236}">
-                <a16:creationId xmlns:a16="http://schemas.microsoft.com/office/drawing/2014/main" id="{75003281-8B6F-445D-857D-4679E8050B1C}"/>
+                <a16:creationId xmlns:a16="http://schemas.microsoft.com/office/drawing/2014/main" id="{90E11DED-AC84-49A7-BF81-D1413D852653}"/>
               </a:ext>
             </a:extLst>
           </p:cNvPr>
@@ -10508,7 +10508,7 @@
           <p:cNvPr id="18" name="">
             <a:extLst xmlns:a="http://schemas.openxmlformats.org/drawingml/2006/main">
               <a:ext uri="{FF2B5EF4-FFF2-40B4-BE49-F238E27FC236}">
-                <a16:creationId xmlns:a16="http://schemas.microsoft.com/office/drawing/2014/main" id="{D187A504-8799-4FC5-8163-B910941830EB}"/>
+                <a16:creationId xmlns:a16="http://schemas.microsoft.com/office/drawing/2014/main" id="{451AA1D4-36C9-403C-AFF7-1D1FBDA6D891}"/>
               </a:ext>
             </a:extLst>
           </p:cNvPr>
@@ -10558,7 +10558,7 @@
           <p:cNvPr id="19" name="">
             <a:extLst xmlns:a="http://schemas.openxmlformats.org/drawingml/2006/main">
               <a:ext uri="{FF2B5EF4-FFF2-40B4-BE49-F238E27FC236}">
-                <a16:creationId xmlns:a16="http://schemas.microsoft.com/office/drawing/2014/main" id="{6EFBCBA3-AAC2-4D0E-92D0-F721EBC0DB14}"/>
+                <a16:creationId xmlns:a16="http://schemas.microsoft.com/office/drawing/2014/main" id="{33196129-A50F-4AA6-811B-67B9FC1F8C1A}"/>
               </a:ext>
             </a:extLst>
           </p:cNvPr>
@@ -10598,7 +10598,7 @@
                   <a:srgbClr val="F7F8FA"/>
                 </a:solidFill>
               </a:rPr>
-              <a:t>Review the evidence</a:t>
+              <a:t>Return with a recommendation</a:t>
             </a:r>
           </a:p>
         </p:txBody>
@@ -10608,7 +10608,7 @@
           <p:cNvPr id="20" name="">
             <a:extLst xmlns:a="http://schemas.openxmlformats.org/drawingml/2006/main">
               <a:ext uri="{FF2B5EF4-FFF2-40B4-BE49-F238E27FC236}">
-                <a16:creationId xmlns:a16="http://schemas.microsoft.com/office/drawing/2014/main" id="{E9865772-B9A0-43D4-9006-EB73FCD33FBC}"/>
+                <a16:creationId xmlns:a16="http://schemas.microsoft.com/office/drawing/2014/main" id="{8BD6C73E-46BB-414F-9D39-04E3030D32E2}"/>
               </a:ext>
             </a:extLst>
           </p:cNvPr>
@@ -10648,7 +10648,7 @@
                   <a:srgbClr val="AAB3C0"/>
                 </a:solidFill>
               </a:rPr>
-              <a:t>Measure traceability, waiting visibility, reuse, and operational fit.</a:t>
+              <a:t>I will report the evidence, remaining risks, organizational gaps, and next justified increment.</a:t>
             </a:r>
           </a:p>
         </p:txBody>
@@ -10658,7 +10658,7 @@
           <p:cNvPr id="21" name="">
             <a:extLst xmlns:a="http://schemas.openxmlformats.org/drawingml/2006/main">
               <a:ext uri="{FF2B5EF4-FFF2-40B4-BE49-F238E27FC236}">
-                <a16:creationId xmlns:a16="http://schemas.microsoft.com/office/drawing/2014/main" id="{EF3CC627-E058-41F3-994E-1D5A81941508}"/>
+                <a16:creationId xmlns:a16="http://schemas.microsoft.com/office/drawing/2014/main" id="{B443BB9C-E67E-4766-8B4E-7089E064457E}"/>
               </a:ext>
             </a:extLst>
           </p:cNvPr>
@@ -10686,19 +10686,19 @@
           <a:lstStyle xmlns:a="http://schemas.openxmlformats.org/drawingml/2006/main"/>
           <a:p xmlns:a="http://schemas.openxmlformats.org/drawingml/2006/main">
             <a:pPr algn="l">
-              <a:defRPr sz="1650" b="1">
+              <a:defRPr sz="1575" b="1">
                 <a:solidFill>
                   <a:srgbClr val="F7F8FA"/>
                 </a:solidFill>
               </a:defRPr>
             </a:pPr>
             <a:r>
-              <a:rPr sz="1650" b="1">
+              <a:rPr sz="1575" b="1">
                 <a:solidFill>
                   <a:srgbClr val="F7F8FA"/>
                 </a:solidFill>
               </a:rPr>
-              <a:t>Keep the first decision small: prove the operating model, then earn the next integration.</a:t>
+              <a:t>Leadership decision requested: sponsor the contained pilot and the required owner participation.</a:t>
             </a:r>
           </a:p>
         </p:txBody>
@@ -10706,7 +10706,7 @@
     </p:spTree>
     <p:extLst>
       <p:ext uri="{BB962C8B-B14F-4D97-AF65-F5344CB8AC3E}">
-        <p14:creationId xmlns:p14="http://schemas.microsoft.com/office/powerpoint/2010/main" val="27417287"/>
+        <p14:creationId xmlns:p14="http://schemas.microsoft.com/office/powerpoint/2010/main" val="197902782"/>
       </p:ext>
     </p:extLst>
   </p:cSld>
